--- a/slides/3-9_antihypertensives_inotropes/3-9_antihypertensives_inotropes.pptx
+++ b/slides/3-9_antihypertensives_inotropes/3-9_antihypertensives_inotropes.pptx
@@ -2284,7 +2284,7 @@
           <a:ln/>
         </p:spPr>
         <p:txBody>
-          <a:bodyPr wrap="square" lIns="0" tIns="0" rIns="0" bIns="0" rtlCol="0" anchor="ctr"/>
+          <a:bodyPr wrap="none" lIns="0" tIns="0" rIns="0" bIns="0" rtlCol="0" anchor="ctr"/>
           <a:lstStyle/>
           <a:p>
             <a:pPr algn="ctr" indent="0" marL="0">
@@ -2327,7 +2327,7 @@
           <a:ln/>
         </p:spPr>
         <p:txBody>
-          <a:bodyPr wrap="square" lIns="0" tIns="0" rIns="0" bIns="0" rtlCol="0" anchor="ctr"/>
+          <a:bodyPr wrap="none" lIns="0" tIns="0" rIns="0" bIns="0" rtlCol="0" anchor="ctr"/>
           <a:lstStyle/>
           <a:p>
             <a:pPr algn="ctr" indent="0" marL="0">
@@ -2370,7 +2370,7 @@
           <a:ln/>
         </p:spPr>
         <p:txBody>
-          <a:bodyPr wrap="square" lIns="0" tIns="0" rIns="0" bIns="0" rtlCol="0" anchor="ctr"/>
+          <a:bodyPr wrap="none" lIns="0" tIns="0" rIns="0" bIns="0" rtlCol="0" anchor="ctr"/>
           <a:lstStyle/>
           <a:p>
             <a:pPr algn="ctr" indent="0" marL="0">
@@ -2413,7 +2413,7 @@
           <a:ln/>
         </p:spPr>
         <p:txBody>
-          <a:bodyPr wrap="square" lIns="0" tIns="0" rIns="0" bIns="0" rtlCol="0" anchor="ctr"/>
+          <a:bodyPr wrap="none" lIns="0" tIns="0" rIns="0" bIns="0" rtlCol="0" anchor="ctr"/>
           <a:lstStyle/>
           <a:p>
             <a:pPr algn="ctr" indent="0" marL="0">
@@ -2456,7 +2456,7 @@
           <a:ln/>
         </p:spPr>
         <p:txBody>
-          <a:bodyPr wrap="square" lIns="0" tIns="0" rIns="0" bIns="0" rtlCol="0" anchor="ctr"/>
+          <a:bodyPr wrap="none" lIns="0" tIns="0" rIns="0" bIns="0" rtlCol="0" anchor="ctr"/>
           <a:lstStyle/>
           <a:p>
             <a:pPr algn="ctr" indent="0" marL="0">
@@ -2982,7 +2982,7 @@
           <a:ln/>
         </p:spPr>
         <p:txBody>
-          <a:bodyPr wrap="square" lIns="0" tIns="0" rIns="0" bIns="0" rtlCol="0" anchor="ctr"/>
+          <a:bodyPr wrap="none" lIns="0" tIns="0" rIns="0" bIns="0" rtlCol="0" anchor="ctr"/>
           <a:lstStyle/>
           <a:p>
             <a:pPr algn="ctr" indent="0" marL="0">
@@ -3025,7 +3025,7 @@
           <a:ln/>
         </p:spPr>
         <p:txBody>
-          <a:bodyPr wrap="square" lIns="0" tIns="0" rIns="0" bIns="0" rtlCol="0" anchor="ctr"/>
+          <a:bodyPr wrap="none" lIns="0" tIns="0" rIns="0" bIns="0" rtlCol="0" anchor="ctr"/>
           <a:lstStyle/>
           <a:p>
             <a:pPr algn="ctr" indent="0" marL="0">
@@ -3068,7 +3068,7 @@
           <a:ln/>
         </p:spPr>
         <p:txBody>
-          <a:bodyPr wrap="square" lIns="0" tIns="0" rIns="0" bIns="0" rtlCol="0" anchor="ctr"/>
+          <a:bodyPr wrap="none" lIns="0" tIns="0" rIns="0" bIns="0" rtlCol="0" anchor="ctr"/>
           <a:lstStyle/>
           <a:p>
             <a:pPr algn="ctr" indent="0" marL="0">
@@ -3111,7 +3111,7 @@
           <a:ln/>
         </p:spPr>
         <p:txBody>
-          <a:bodyPr wrap="square" lIns="0" tIns="0" rIns="0" bIns="0" rtlCol="0" anchor="ctr"/>
+          <a:bodyPr wrap="none" lIns="0" tIns="0" rIns="0" bIns="0" rtlCol="0" anchor="ctr"/>
           <a:lstStyle/>
           <a:p>
             <a:pPr algn="ctr" indent="0" marL="0">
@@ -3154,7 +3154,7 @@
           <a:ln/>
         </p:spPr>
         <p:txBody>
-          <a:bodyPr wrap="square" lIns="0" tIns="0" rIns="0" bIns="0" rtlCol="0" anchor="ctr"/>
+          <a:bodyPr wrap="none" lIns="0" tIns="0" rIns="0" bIns="0" rtlCol="0" anchor="ctr"/>
           <a:lstStyle/>
           <a:p>
             <a:pPr algn="ctr" indent="0" marL="0">
@@ -4686,7 +4686,7 @@
           <a:ln/>
         </p:spPr>
         <p:txBody>
-          <a:bodyPr wrap="square" lIns="0" tIns="0" rIns="0" bIns="0" rtlCol="0" anchor="ctr"/>
+          <a:bodyPr wrap="none" lIns="0" tIns="0" rIns="0" bIns="0" rtlCol="0" anchor="ctr"/>
           <a:lstStyle/>
           <a:p>
             <a:pPr algn="ctr" indent="0" marL="0">
@@ -4729,7 +4729,7 @@
           <a:ln/>
         </p:spPr>
         <p:txBody>
-          <a:bodyPr wrap="square" lIns="0" tIns="0" rIns="0" bIns="0" rtlCol="0" anchor="ctr"/>
+          <a:bodyPr wrap="none" lIns="0" tIns="0" rIns="0" bIns="0" rtlCol="0" anchor="ctr"/>
           <a:lstStyle/>
           <a:p>
             <a:pPr algn="ctr" indent="0" marL="0">
@@ -4772,7 +4772,7 @@
           <a:ln/>
         </p:spPr>
         <p:txBody>
-          <a:bodyPr wrap="square" lIns="0" tIns="0" rIns="0" bIns="0" rtlCol="0" anchor="ctr"/>
+          <a:bodyPr wrap="none" lIns="0" tIns="0" rIns="0" bIns="0" rtlCol="0" anchor="ctr"/>
           <a:lstStyle/>
           <a:p>
             <a:pPr algn="ctr" indent="0" marL="0">
@@ -4815,7 +4815,7 @@
           <a:ln/>
         </p:spPr>
         <p:txBody>
-          <a:bodyPr wrap="square" lIns="0" tIns="0" rIns="0" bIns="0" rtlCol="0" anchor="ctr"/>
+          <a:bodyPr wrap="none" lIns="0" tIns="0" rIns="0" bIns="0" rtlCol="0" anchor="ctr"/>
           <a:lstStyle/>
           <a:p>
             <a:pPr algn="ctr" indent="0" marL="0">
@@ -4858,7 +4858,7 @@
           <a:ln/>
         </p:spPr>
         <p:txBody>
-          <a:bodyPr wrap="square" lIns="0" tIns="0" rIns="0" bIns="0" rtlCol="0" anchor="ctr"/>
+          <a:bodyPr wrap="none" lIns="0" tIns="0" rIns="0" bIns="0" rtlCol="0" anchor="ctr"/>
           <a:lstStyle/>
           <a:p>
             <a:pPr algn="ctr" indent="0" marL="0">
@@ -5219,7 +5219,7 @@
           <a:ln/>
         </p:spPr>
         <p:txBody>
-          <a:bodyPr wrap="square" lIns="0" tIns="0" rIns="0" bIns="0" rtlCol="0" anchor="ctr"/>
+          <a:bodyPr wrap="none" lIns="0" tIns="0" rIns="0" bIns="0" rtlCol="0" anchor="ctr"/>
           <a:lstStyle/>
           <a:p>
             <a:pPr algn="ctr" indent="0" marL="0">
@@ -5262,7 +5262,7 @@
           <a:ln/>
         </p:spPr>
         <p:txBody>
-          <a:bodyPr wrap="square" lIns="0" tIns="0" rIns="0" bIns="0" rtlCol="0" anchor="ctr"/>
+          <a:bodyPr wrap="none" lIns="0" tIns="0" rIns="0" bIns="0" rtlCol="0" anchor="ctr"/>
           <a:lstStyle/>
           <a:p>
             <a:pPr algn="ctr" indent="0" marL="0">
@@ -5305,7 +5305,7 @@
           <a:ln/>
         </p:spPr>
         <p:txBody>
-          <a:bodyPr wrap="square" lIns="0" tIns="0" rIns="0" bIns="0" rtlCol="0" anchor="ctr"/>
+          <a:bodyPr wrap="none" lIns="0" tIns="0" rIns="0" bIns="0" rtlCol="0" anchor="ctr"/>
           <a:lstStyle/>
           <a:p>
             <a:pPr algn="ctr" indent="0" marL="0">
@@ -5348,7 +5348,7 @@
           <a:ln/>
         </p:spPr>
         <p:txBody>
-          <a:bodyPr wrap="square" lIns="0" tIns="0" rIns="0" bIns="0" rtlCol="0" anchor="ctr"/>
+          <a:bodyPr wrap="none" lIns="0" tIns="0" rIns="0" bIns="0" rtlCol="0" anchor="ctr"/>
           <a:lstStyle/>
           <a:p>
             <a:pPr algn="ctr" indent="0" marL="0">
@@ -5391,7 +5391,7 @@
           <a:ln/>
         </p:spPr>
         <p:txBody>
-          <a:bodyPr wrap="square" lIns="0" tIns="0" rIns="0" bIns="0" rtlCol="0" anchor="ctr"/>
+          <a:bodyPr wrap="none" lIns="0" tIns="0" rIns="0" bIns="0" rtlCol="0" anchor="ctr"/>
           <a:lstStyle/>
           <a:p>
             <a:pPr algn="ctr" indent="0" marL="0">
@@ -6443,7 +6443,7 @@
           <a:ln/>
         </p:spPr>
         <p:txBody>
-          <a:bodyPr wrap="square" lIns="0" tIns="0" rIns="0" bIns="0" rtlCol="0" anchor="ctr"/>
+          <a:bodyPr wrap="none" lIns="0" tIns="0" rIns="0" bIns="0" rtlCol="0" anchor="ctr"/>
           <a:lstStyle/>
           <a:p>
             <a:pPr algn="ctr" indent="0" marL="0">
@@ -6486,7 +6486,7 @@
           <a:ln/>
         </p:spPr>
         <p:txBody>
-          <a:bodyPr wrap="square" lIns="0" tIns="0" rIns="0" bIns="0" rtlCol="0" anchor="ctr"/>
+          <a:bodyPr wrap="none" lIns="0" tIns="0" rIns="0" bIns="0" rtlCol="0" anchor="ctr"/>
           <a:lstStyle/>
           <a:p>
             <a:pPr algn="ctr" indent="0" marL="0">
@@ -6529,7 +6529,7 @@
           <a:ln/>
         </p:spPr>
         <p:txBody>
-          <a:bodyPr wrap="square" lIns="0" tIns="0" rIns="0" bIns="0" rtlCol="0" anchor="ctr"/>
+          <a:bodyPr wrap="none" lIns="0" tIns="0" rIns="0" bIns="0" rtlCol="0" anchor="ctr"/>
           <a:lstStyle/>
           <a:p>
             <a:pPr algn="ctr" indent="0" marL="0">
@@ -6572,7 +6572,7 @@
           <a:ln/>
         </p:spPr>
         <p:txBody>
-          <a:bodyPr wrap="square" lIns="0" tIns="0" rIns="0" bIns="0" rtlCol="0" anchor="ctr"/>
+          <a:bodyPr wrap="none" lIns="0" tIns="0" rIns="0" bIns="0" rtlCol="0" anchor="ctr"/>
           <a:lstStyle/>
           <a:p>
             <a:pPr algn="ctr" indent="0" marL="0">
@@ -6615,7 +6615,7 @@
           <a:ln/>
         </p:spPr>
         <p:txBody>
-          <a:bodyPr wrap="square" lIns="0" tIns="0" rIns="0" bIns="0" rtlCol="0" anchor="ctr"/>
+          <a:bodyPr wrap="none" lIns="0" tIns="0" rIns="0" bIns="0" rtlCol="0" anchor="ctr"/>
           <a:lstStyle/>
           <a:p>
             <a:pPr algn="ctr" indent="0" marL="0">
@@ -7718,7 +7718,7 @@
           <a:ln/>
         </p:spPr>
         <p:txBody>
-          <a:bodyPr wrap="square" lIns="0" tIns="0" rIns="0" bIns="0" rtlCol="0" anchor="ctr"/>
+          <a:bodyPr wrap="none" lIns="0" tIns="0" rIns="0" bIns="0" rtlCol="0" anchor="ctr"/>
           <a:lstStyle/>
           <a:p>
             <a:pPr algn="ctr" indent="0" marL="0">
@@ -7761,7 +7761,7 @@
           <a:ln/>
         </p:spPr>
         <p:txBody>
-          <a:bodyPr wrap="square" lIns="0" tIns="0" rIns="0" bIns="0" rtlCol="0" anchor="ctr"/>
+          <a:bodyPr wrap="none" lIns="0" tIns="0" rIns="0" bIns="0" rtlCol="0" anchor="ctr"/>
           <a:lstStyle/>
           <a:p>
             <a:pPr algn="ctr" indent="0" marL="0">
@@ -7804,7 +7804,7 @@
           <a:ln/>
         </p:spPr>
         <p:txBody>
-          <a:bodyPr wrap="square" lIns="0" tIns="0" rIns="0" bIns="0" rtlCol="0" anchor="ctr"/>
+          <a:bodyPr wrap="none" lIns="0" tIns="0" rIns="0" bIns="0" rtlCol="0" anchor="ctr"/>
           <a:lstStyle/>
           <a:p>
             <a:pPr algn="ctr" indent="0" marL="0">
@@ -7847,7 +7847,7 @@
           <a:ln/>
         </p:spPr>
         <p:txBody>
-          <a:bodyPr wrap="square" lIns="0" tIns="0" rIns="0" bIns="0" rtlCol="0" anchor="ctr"/>
+          <a:bodyPr wrap="none" lIns="0" tIns="0" rIns="0" bIns="0" rtlCol="0" anchor="ctr"/>
           <a:lstStyle/>
           <a:p>
             <a:pPr algn="ctr" indent="0" marL="0">
@@ -7890,7 +7890,7 @@
           <a:ln/>
         </p:spPr>
         <p:txBody>
-          <a:bodyPr wrap="square" lIns="0" tIns="0" rIns="0" bIns="0" rtlCol="0" anchor="ctr"/>
+          <a:bodyPr wrap="none" lIns="0" tIns="0" rIns="0" bIns="0" rtlCol="0" anchor="ctr"/>
           <a:lstStyle/>
           <a:p>
             <a:pPr algn="ctr" indent="0" marL="0">
@@ -9092,7 +9092,7 @@
           <a:ln/>
         </p:spPr>
         <p:txBody>
-          <a:bodyPr wrap="square" lIns="0" tIns="0" rIns="0" bIns="0" rtlCol="0" anchor="ctr"/>
+          <a:bodyPr wrap="none" lIns="0" tIns="0" rIns="0" bIns="0" rtlCol="0" anchor="ctr"/>
           <a:lstStyle/>
           <a:p>
             <a:pPr algn="ctr" indent="0" marL="0">
@@ -9135,7 +9135,7 @@
           <a:ln/>
         </p:spPr>
         <p:txBody>
-          <a:bodyPr wrap="square" lIns="0" tIns="0" rIns="0" bIns="0" rtlCol="0" anchor="ctr"/>
+          <a:bodyPr wrap="none" lIns="0" tIns="0" rIns="0" bIns="0" rtlCol="0" anchor="ctr"/>
           <a:lstStyle/>
           <a:p>
             <a:pPr algn="ctr" indent="0" marL="0">
@@ -9178,7 +9178,7 @@
           <a:ln/>
         </p:spPr>
         <p:txBody>
-          <a:bodyPr wrap="square" lIns="0" tIns="0" rIns="0" bIns="0" rtlCol="0" anchor="ctr"/>
+          <a:bodyPr wrap="none" lIns="0" tIns="0" rIns="0" bIns="0" rtlCol="0" anchor="ctr"/>
           <a:lstStyle/>
           <a:p>
             <a:pPr algn="ctr" indent="0" marL="0">
@@ -9221,7 +9221,7 @@
           <a:ln/>
         </p:spPr>
         <p:txBody>
-          <a:bodyPr wrap="square" lIns="0" tIns="0" rIns="0" bIns="0" rtlCol="0" anchor="ctr"/>
+          <a:bodyPr wrap="none" lIns="0" tIns="0" rIns="0" bIns="0" rtlCol="0" anchor="ctr"/>
           <a:lstStyle/>
           <a:p>
             <a:pPr algn="ctr" indent="0" marL="0">
@@ -9264,7 +9264,7 @@
           <a:ln/>
         </p:spPr>
         <p:txBody>
-          <a:bodyPr wrap="square" lIns="0" tIns="0" rIns="0" bIns="0" rtlCol="0" anchor="ctr"/>
+          <a:bodyPr wrap="none" lIns="0" tIns="0" rIns="0" bIns="0" rtlCol="0" anchor="ctr"/>
           <a:lstStyle/>
           <a:p>
             <a:pPr algn="ctr" indent="0" marL="0">
@@ -10376,7 +10376,7 @@
           <a:ln/>
         </p:spPr>
         <p:txBody>
-          <a:bodyPr wrap="square" lIns="0" tIns="0" rIns="0" bIns="0" rtlCol="0" anchor="ctr"/>
+          <a:bodyPr wrap="none" lIns="0" tIns="0" rIns="0" bIns="0" rtlCol="0" anchor="ctr"/>
           <a:lstStyle/>
           <a:p>
             <a:pPr algn="ctr" indent="0" marL="0">
@@ -10419,7 +10419,7 @@
           <a:ln/>
         </p:spPr>
         <p:txBody>
-          <a:bodyPr wrap="square" lIns="0" tIns="0" rIns="0" bIns="0" rtlCol="0" anchor="ctr"/>
+          <a:bodyPr wrap="none" lIns="0" tIns="0" rIns="0" bIns="0" rtlCol="0" anchor="ctr"/>
           <a:lstStyle/>
           <a:p>
             <a:pPr algn="ctr" indent="0" marL="0">
@@ -10462,7 +10462,7 @@
           <a:ln/>
         </p:spPr>
         <p:txBody>
-          <a:bodyPr wrap="square" lIns="0" tIns="0" rIns="0" bIns="0" rtlCol="0" anchor="ctr"/>
+          <a:bodyPr wrap="none" lIns="0" tIns="0" rIns="0" bIns="0" rtlCol="0" anchor="ctr"/>
           <a:lstStyle/>
           <a:p>
             <a:pPr algn="ctr" indent="0" marL="0">
@@ -10505,7 +10505,7 @@
           <a:ln/>
         </p:spPr>
         <p:txBody>
-          <a:bodyPr wrap="square" lIns="0" tIns="0" rIns="0" bIns="0" rtlCol="0" anchor="ctr"/>
+          <a:bodyPr wrap="none" lIns="0" tIns="0" rIns="0" bIns="0" rtlCol="0" anchor="ctr"/>
           <a:lstStyle/>
           <a:p>
             <a:pPr algn="ctr" indent="0" marL="0">
@@ -10548,7 +10548,7 @@
           <a:ln/>
         </p:spPr>
         <p:txBody>
-          <a:bodyPr wrap="square" lIns="0" tIns="0" rIns="0" bIns="0" rtlCol="0" anchor="ctr"/>
+          <a:bodyPr wrap="none" lIns="0" tIns="0" rIns="0" bIns="0" rtlCol="0" anchor="ctr"/>
           <a:lstStyle/>
           <a:p>
             <a:pPr algn="ctr" indent="0" marL="0">
@@ -11733,7 +11733,7 @@
           <a:ln/>
         </p:spPr>
         <p:txBody>
-          <a:bodyPr wrap="square" lIns="0" tIns="0" rIns="0" bIns="0" rtlCol="0" anchor="ctr"/>
+          <a:bodyPr wrap="none" lIns="0" tIns="0" rIns="0" bIns="0" rtlCol="0" anchor="ctr"/>
           <a:lstStyle/>
           <a:p>
             <a:pPr algn="ctr" indent="0" marL="0">
@@ -11776,7 +11776,7 @@
           <a:ln/>
         </p:spPr>
         <p:txBody>
-          <a:bodyPr wrap="square" lIns="0" tIns="0" rIns="0" bIns="0" rtlCol="0" anchor="ctr"/>
+          <a:bodyPr wrap="none" lIns="0" tIns="0" rIns="0" bIns="0" rtlCol="0" anchor="ctr"/>
           <a:lstStyle/>
           <a:p>
             <a:pPr algn="ctr" indent="0" marL="0">
@@ -11819,7 +11819,7 @@
           <a:ln/>
         </p:spPr>
         <p:txBody>
-          <a:bodyPr wrap="square" lIns="0" tIns="0" rIns="0" bIns="0" rtlCol="0" anchor="ctr"/>
+          <a:bodyPr wrap="none" lIns="0" tIns="0" rIns="0" bIns="0" rtlCol="0" anchor="ctr"/>
           <a:lstStyle/>
           <a:p>
             <a:pPr algn="ctr" indent="0" marL="0">
@@ -11862,7 +11862,7 @@
           <a:ln/>
         </p:spPr>
         <p:txBody>
-          <a:bodyPr wrap="square" lIns="0" tIns="0" rIns="0" bIns="0" rtlCol="0" anchor="ctr"/>
+          <a:bodyPr wrap="none" lIns="0" tIns="0" rIns="0" bIns="0" rtlCol="0" anchor="ctr"/>
           <a:lstStyle/>
           <a:p>
             <a:pPr algn="ctr" indent="0" marL="0">
@@ -11905,7 +11905,7 @@
           <a:ln/>
         </p:spPr>
         <p:txBody>
-          <a:bodyPr wrap="square" lIns="0" tIns="0" rIns="0" bIns="0" rtlCol="0" anchor="ctr"/>
+          <a:bodyPr wrap="none" lIns="0" tIns="0" rIns="0" bIns="0" rtlCol="0" anchor="ctr"/>
           <a:lstStyle/>
           <a:p>
             <a:pPr algn="ctr" indent="0" marL="0">

--- a/slides/3-9_antihypertensives_inotropes/3-9_antihypertensives_inotropes.pptx
+++ b/slides/3-9_antihypertensives_inotropes/3-9_antihypertensives_inotropes.pptx
@@ -3293,11 +3293,11 @@
             <a:tbl>
               <a:tblPr/>
               <a:tblGrid>
-                <a:gridCol w="2286000"/>
-                <a:gridCol w="3108960"/>
-                <a:gridCol w="5788152"/>
+                <a:gridCol w="2011680"/>
+                <a:gridCol w="3840480"/>
+                <a:gridCol w="5330952"/>
               </a:tblGrid>
-              <a:tr h="621792">
+              <a:tr h="640080">
                 <a:tc>
                   <a:txBody>
                     <a:bodyPr/>
@@ -3307,7 +3307,7 @@
                         <a:buNone/>
                       </a:pPr>
                       <a:r>
-                        <a:rPr lang="ja-JP" altLang="en-US" sz="2400" b="1" dirty="0">
+                        <a:rPr lang="ja-JP" altLang="en-US" sz="2200" b="1" dirty="0">
                           <a:solidFill>
                             <a:srgbClr val="262626"/>
                           </a:solidFill>
@@ -3317,7 +3317,7 @@
                         </a:rPr>
                         <a:t>動かす要素</a:t>
                       </a:r>
-                      <a:endParaRPr lang="en-US" sz="2400" dirty="0">
+                      <a:endParaRPr lang="en-US" sz="2200" dirty="0">
                         <a:latin typeface="メイリオ" charset="0"/>
                         <a:ea typeface="メイリオ" charset="0"/>
                         <a:cs typeface="メイリオ" charset="0"/>
@@ -3375,7 +3375,7 @@
                         <a:buNone/>
                       </a:pPr>
                       <a:r>
-                        <a:rPr lang="ja-JP" altLang="en-US" sz="2400" b="1" dirty="0">
+                        <a:rPr lang="ja-JP" altLang="en-US" sz="2200" b="1" dirty="0">
                           <a:solidFill>
                             <a:srgbClr val="262626"/>
                           </a:solidFill>
@@ -3385,7 +3385,7 @@
                         </a:rPr>
                         <a:t>方向</a:t>
                       </a:r>
-                      <a:endParaRPr lang="en-US" sz="2400" dirty="0">
+                      <a:endParaRPr lang="en-US" sz="2200" dirty="0">
                         <a:latin typeface="メイリオ" charset="0"/>
                         <a:ea typeface="メイリオ" charset="0"/>
                         <a:cs typeface="メイリオ" charset="0"/>
@@ -3443,7 +3443,7 @@
                         <a:buNone/>
                       </a:pPr>
                       <a:r>
-                        <a:rPr lang="ja-JP" altLang="en-US" sz="2400" b="1" dirty="0">
+                        <a:rPr lang="ja-JP" altLang="en-US" sz="2200" b="1" dirty="0">
                           <a:solidFill>
                             <a:srgbClr val="262626"/>
                           </a:solidFill>
@@ -3453,7 +3453,7 @@
                         </a:rPr>
                         <a:t>薬</a:t>
                       </a:r>
-                      <a:endParaRPr lang="en-US" sz="2400" dirty="0">
+                      <a:endParaRPr lang="en-US" sz="2200" dirty="0">
                         <a:latin typeface="メイリオ" charset="0"/>
                         <a:ea typeface="メイリオ" charset="0"/>
                         <a:cs typeface="メイリオ" charset="0"/>
@@ -3503,7 +3503,7 @@
                   </a:tcPr>
                 </a:tc>
               </a:tr>
-              <a:tr h="621792">
+              <a:tr h="713232">
                 <a:tc>
                   <a:txBody>
                     <a:bodyPr/>
@@ -3513,7 +3513,7 @@
                         <a:buNone/>
                       </a:pPr>
                       <a:r>
-                        <a:rPr lang="ja-JP" altLang="en-US" sz="2400" b="1" dirty="0">
+                        <a:rPr lang="ja-JP" altLang="en-US" sz="2200" b="1" dirty="0">
                           <a:solidFill>
                             <a:srgbClr val="262626"/>
                           </a:solidFill>
@@ -3523,7 +3523,7 @@
                         </a:rPr>
                         <a:t>後負荷</a:t>
                       </a:r>
-                      <a:endParaRPr lang="en-US" sz="2400" dirty="0">
+                      <a:endParaRPr lang="en-US" sz="2200" dirty="0">
                         <a:latin typeface="メイリオ" charset="0"/>
                         <a:ea typeface="メイリオ" charset="0"/>
                         <a:cs typeface="メイリオ" charset="0"/>
@@ -3578,7 +3578,7 @@
                         <a:buNone/>
                       </a:pPr>
                       <a:r>
-                        <a:rPr lang="ja-JP" altLang="en-US" sz="2400" b="1" dirty="0">
+                        <a:rPr lang="ja-JP" altLang="en-US" sz="2200" b="1" dirty="0">
                           <a:solidFill>
                             <a:srgbClr val="0072B2"/>
                           </a:solidFill>
@@ -3588,7 +3588,7 @@
                         </a:rPr>
                         <a:t>下げる</a:t>
                       </a:r>
-                      <a:endParaRPr lang="en-US" sz="2400" dirty="0">
+                      <a:endParaRPr lang="en-US" sz="2200" dirty="0">
                         <a:latin typeface="メイリオ" charset="0"/>
                         <a:ea typeface="メイリオ" charset="0"/>
                         <a:cs typeface="メイリオ" charset="0"/>
@@ -3643,7 +3643,7 @@
                         <a:buNone/>
                       </a:pPr>
                       <a:r>
-                        <a:rPr lang="ja-JP" altLang="en-US" sz="2400" b="1" dirty="0">
+                        <a:rPr lang="ja-JP" altLang="en-US" sz="2200" b="1" dirty="0">
                           <a:solidFill>
                             <a:srgbClr val="262626"/>
                           </a:solidFill>
@@ -3654,7 +3654,7 @@
                         <a:t>ニカルジピン</a:t>
                       </a:r>
                       <a:r>
-                        <a:rPr lang="ja-JP" altLang="en-US" sz="2400" dirty="0">
+                        <a:rPr lang="ja-JP" altLang="en-US" sz="2200" dirty="0">
                           <a:solidFill>
                             <a:srgbClr val="262626"/>
                           </a:solidFill>
@@ -3664,7 +3664,7 @@
                         </a:rPr>
                         <a:t>（動脈を広げる）</a:t>
                       </a:r>
-                      <a:endParaRPr lang="en-US" sz="2400" dirty="0">
+                      <a:endParaRPr lang="en-US" sz="2200" dirty="0">
                         <a:latin typeface="メイリオ" charset="0"/>
                         <a:ea typeface="メイリオ" charset="0"/>
                         <a:cs typeface="メイリオ" charset="0"/>
@@ -3711,7 +3711,7 @@
                   </a:tcPr>
                 </a:tc>
               </a:tr>
-              <a:tr h="621792">
+              <a:tr h="713232">
                 <a:tc>
                   <a:txBody>
                     <a:bodyPr/>
@@ -3721,7 +3721,7 @@
                         <a:buNone/>
                       </a:pPr>
                       <a:r>
-                        <a:rPr lang="ja-JP" altLang="en-US" sz="2400" b="1" dirty="0">
+                        <a:rPr lang="ja-JP" altLang="en-US" sz="2200" b="1" dirty="0">
                           <a:solidFill>
                             <a:srgbClr val="262626"/>
                           </a:solidFill>
@@ -3731,7 +3731,7 @@
                         </a:rPr>
                         <a:t>前負荷</a:t>
                       </a:r>
-                      <a:endParaRPr lang="en-US" sz="2400" dirty="0">
+                      <a:endParaRPr lang="en-US" sz="2200" dirty="0">
                         <a:latin typeface="メイリオ" charset="0"/>
                         <a:ea typeface="メイリオ" charset="0"/>
                         <a:cs typeface="メイリオ" charset="0"/>
@@ -3786,7 +3786,7 @@
                         <a:buNone/>
                       </a:pPr>
                       <a:r>
-                        <a:rPr lang="ja-JP" altLang="en-US" sz="2400" b="1" dirty="0">
+                        <a:rPr lang="ja-JP" altLang="en-US" sz="2200" b="1" dirty="0">
                           <a:solidFill>
                             <a:srgbClr val="0072B2"/>
                           </a:solidFill>
@@ -3796,7 +3796,7 @@
                         </a:rPr>
                         <a:t>下げる</a:t>
                       </a:r>
-                      <a:endParaRPr lang="en-US" sz="2400" dirty="0">
+                      <a:endParaRPr lang="en-US" sz="2200" dirty="0">
                         <a:latin typeface="メイリオ" charset="0"/>
                         <a:ea typeface="メイリオ" charset="0"/>
                         <a:cs typeface="メイリオ" charset="0"/>
@@ -3851,7 +3851,7 @@
                         <a:buNone/>
                       </a:pPr>
                       <a:r>
-                        <a:rPr lang="ja-JP" altLang="en-US" sz="2400" b="1" dirty="0">
+                        <a:rPr lang="ja-JP" altLang="en-US" sz="2200" b="1" dirty="0">
                           <a:solidFill>
                             <a:srgbClr val="262626"/>
                           </a:solidFill>
@@ -3862,7 +3862,7 @@
                         <a:t>ニトログリセリン</a:t>
                       </a:r>
                       <a:r>
-                        <a:rPr lang="ja-JP" altLang="en-US" sz="2400" dirty="0">
+                        <a:rPr lang="ja-JP" altLang="en-US" sz="2200" dirty="0">
                           <a:solidFill>
                             <a:srgbClr val="262626"/>
                           </a:solidFill>
@@ -3872,7 +3872,7 @@
                         </a:rPr>
                         <a:t>（静脈を広げる）</a:t>
                       </a:r>
-                      <a:endParaRPr lang="en-US" sz="2400" dirty="0">
+                      <a:endParaRPr lang="en-US" sz="2200" dirty="0">
                         <a:latin typeface="メイリオ" charset="0"/>
                         <a:ea typeface="メイリオ" charset="0"/>
                         <a:cs typeface="メイリオ" charset="0"/>
@@ -3919,7 +3919,7 @@
                   </a:tcPr>
                 </a:tc>
               </a:tr>
-              <a:tr h="621792">
+              <a:tr h="713232">
                 <a:tc>
                   <a:txBody>
                     <a:bodyPr/>
@@ -3929,7 +3929,7 @@
                         <a:buNone/>
                       </a:pPr>
                       <a:r>
-                        <a:rPr lang="ja-JP" altLang="en-US" sz="2400" b="1" dirty="0">
+                        <a:rPr lang="ja-JP" altLang="en-US" sz="2200" b="1" dirty="0">
                           <a:solidFill>
                             <a:srgbClr val="262626"/>
                           </a:solidFill>
@@ -3939,7 +3939,7 @@
                         </a:rPr>
                         <a:t>心拍数</a:t>
                       </a:r>
-                      <a:endParaRPr lang="en-US" sz="2400" dirty="0">
+                      <a:endParaRPr lang="en-US" sz="2200" dirty="0">
                         <a:latin typeface="メイリオ" charset="0"/>
                         <a:ea typeface="メイリオ" charset="0"/>
                         <a:cs typeface="メイリオ" charset="0"/>
@@ -3994,7 +3994,7 @@
                         <a:buNone/>
                       </a:pPr>
                       <a:r>
-                        <a:rPr lang="ja-JP" altLang="en-US" sz="2400" b="1" dirty="0">
+                        <a:rPr lang="ja-JP" altLang="en-US" sz="2200" b="1" dirty="0">
                           <a:solidFill>
                             <a:srgbClr val="0072B2"/>
                           </a:solidFill>
@@ -4004,7 +4004,7 @@
                         </a:rPr>
                         <a:t>下げる</a:t>
                       </a:r>
-                      <a:endParaRPr lang="en-US" sz="2400" dirty="0">
+                      <a:endParaRPr lang="en-US" sz="2200" dirty="0">
                         <a:latin typeface="メイリオ" charset="0"/>
                         <a:ea typeface="メイリオ" charset="0"/>
                         <a:cs typeface="メイリオ" charset="0"/>
@@ -4059,7 +4059,7 @@
                         <a:buNone/>
                       </a:pPr>
                       <a:r>
-                        <a:rPr lang="ja-JP" altLang="en-US" sz="2400" b="1" dirty="0">
+                        <a:rPr lang="ja-JP" altLang="en-US" sz="2200" b="1" dirty="0">
                           <a:solidFill>
                             <a:srgbClr val="262626"/>
                           </a:solidFill>
@@ -4070,7 +4070,7 @@
                         <a:t>ランジオロール</a:t>
                       </a:r>
                       <a:r>
-                        <a:rPr lang="ja-JP" altLang="en-US" sz="2400" dirty="0">
+                        <a:rPr lang="ja-JP" altLang="en-US" sz="2200" dirty="0">
                           <a:solidFill>
                             <a:srgbClr val="262626"/>
                           </a:solidFill>
@@ -4080,7 +4080,7 @@
                         </a:rPr>
                         <a:t>（β1 遮断）</a:t>
                       </a:r>
-                      <a:endParaRPr lang="en-US" sz="2400" dirty="0">
+                      <a:endParaRPr lang="en-US" sz="2200" dirty="0">
                         <a:latin typeface="メイリオ" charset="0"/>
                         <a:ea typeface="メイリオ" charset="0"/>
                         <a:cs typeface="メイリオ" charset="0"/>
@@ -4127,7 +4127,7 @@
                   </a:tcPr>
                 </a:tc>
               </a:tr>
-              <a:tr h="621792">
+              <a:tr h="713232">
                 <a:tc>
                   <a:txBody>
                     <a:bodyPr/>
@@ -4137,7 +4137,7 @@
                         <a:buNone/>
                       </a:pPr>
                       <a:r>
-                        <a:rPr lang="ja-JP" altLang="en-US" sz="2400" b="1" dirty="0">
+                        <a:rPr lang="ja-JP" altLang="en-US" sz="2200" b="1" dirty="0">
                           <a:solidFill>
                             <a:srgbClr val="262626"/>
                           </a:solidFill>
@@ -4147,7 +4147,7 @@
                         </a:rPr>
                         <a:t>収縮力</a:t>
                       </a:r>
-                      <a:endParaRPr lang="en-US" sz="2400" dirty="0">
+                      <a:endParaRPr lang="en-US" sz="2200" dirty="0">
                         <a:latin typeface="メイリオ" charset="0"/>
                         <a:ea typeface="メイリオ" charset="0"/>
                         <a:cs typeface="メイリオ" charset="0"/>
@@ -4202,7 +4202,7 @@
                         <a:buNone/>
                       </a:pPr>
                       <a:r>
-                        <a:rPr lang="ja-JP" altLang="en-US" sz="2400" b="1" dirty="0">
+                        <a:rPr lang="ja-JP" altLang="en-US" sz="2200" b="1" dirty="0">
                           <a:solidFill>
                             <a:srgbClr val="D55E00"/>
                           </a:solidFill>
@@ -4212,7 +4212,7 @@
                         </a:rPr>
                         <a:t>上げる</a:t>
                       </a:r>
-                      <a:endParaRPr lang="en-US" sz="2400" dirty="0">
+                      <a:endParaRPr lang="en-US" sz="2200" dirty="0">
                         <a:latin typeface="メイリオ" charset="0"/>
                         <a:ea typeface="メイリオ" charset="0"/>
                         <a:cs typeface="メイリオ" charset="0"/>
@@ -4267,7 +4267,7 @@
                         <a:buNone/>
                       </a:pPr>
                       <a:r>
-                        <a:rPr lang="ja-JP" altLang="en-US" sz="2400" b="1" dirty="0">
+                        <a:rPr lang="ja-JP" altLang="en-US" sz="2200" b="1" dirty="0">
                           <a:solidFill>
                             <a:srgbClr val="262626"/>
                           </a:solidFill>
@@ -4278,7 +4278,7 @@
                         <a:t>ドブタミン</a:t>
                       </a:r>
                       <a:r>
-                        <a:rPr lang="ja-JP" altLang="en-US" sz="2400" dirty="0">
+                        <a:rPr lang="ja-JP" altLang="en-US" sz="2200" dirty="0">
                           <a:solidFill>
                             <a:srgbClr val="262626"/>
                           </a:solidFill>
@@ -4288,7 +4288,7 @@
                         </a:rPr>
                         <a:t>（β1 刺激）</a:t>
                       </a:r>
-                      <a:endParaRPr lang="en-US" sz="2400" dirty="0">
+                      <a:endParaRPr lang="en-US" sz="2200" dirty="0">
                         <a:latin typeface="メイリオ" charset="0"/>
                         <a:ea typeface="メイリオ" charset="0"/>
                         <a:cs typeface="メイリオ" charset="0"/>
@@ -4335,7 +4335,7 @@
                   </a:tcPr>
                 </a:tc>
               </a:tr>
-              <a:tr h="1078992">
+              <a:tr h="713232">
                 <a:tc>
                   <a:txBody>
                     <a:bodyPr/>
@@ -4345,7 +4345,7 @@
                         <a:buNone/>
                       </a:pPr>
                       <a:r>
-                        <a:rPr lang="ja-JP" altLang="en-US" sz="2400" b="1" dirty="0">
+                        <a:rPr lang="ja-JP" altLang="en-US" sz="2200" b="1" dirty="0">
                           <a:solidFill>
                             <a:srgbClr val="262626"/>
                           </a:solidFill>
@@ -4355,7 +4355,7 @@
                         </a:rPr>
                         <a:t>全部</a:t>
                       </a:r>
-                      <a:endParaRPr lang="en-US" sz="2400" dirty="0">
+                      <a:endParaRPr lang="en-US" sz="2200" dirty="0">
                         <a:latin typeface="メイリオ" charset="0"/>
                         <a:ea typeface="メイリオ" charset="0"/>
                         <a:cs typeface="メイリオ" charset="0"/>
@@ -4410,7 +4410,7 @@
                         <a:buNone/>
                       </a:pPr>
                       <a:r>
-                        <a:rPr lang="ja-JP" altLang="en-US" sz="2400" b="1" dirty="0">
+                        <a:rPr lang="ja-JP" altLang="en-US" sz="2200" b="1" dirty="0">
                           <a:solidFill>
                             <a:srgbClr val="D55E00"/>
                           </a:solidFill>
@@ -4420,18 +4420,8 @@
                         </a:rPr>
                         <a:t>上げる</a:t>
                       </a:r>
-                      <a:endParaRPr lang="en-US" sz="2400" dirty="0">
-                        <a:latin typeface="メイリオ" charset="0"/>
-                        <a:ea typeface="メイリオ" charset="0"/>
-                        <a:cs typeface="メイリオ" charset="0"/>
-                      </a:endParaRPr>
-                    </a:p>
-                    <a:p>
-                      <a:pPr algn="ctr" indent="0" marL="0">
-                        <a:buNone/>
-                      </a:pPr>
                       <a:r>
-                        <a:rPr lang="ja-JP" altLang="en-US" sz="2400" dirty="0">
+                        <a:rPr lang="ja-JP" altLang="en-US" sz="2200" dirty="0">
                           <a:solidFill>
                             <a:srgbClr val="262626"/>
                           </a:solidFill>
@@ -4441,7 +4431,7 @@
                         </a:rPr>
                         <a:t>（用量で変わる）</a:t>
                       </a:r>
-                      <a:endParaRPr lang="en-US" sz="2400" dirty="0">
+                      <a:endParaRPr lang="en-US" sz="2200" dirty="0">
                         <a:latin typeface="メイリオ" charset="0"/>
                         <a:ea typeface="メイリオ" charset="0"/>
                         <a:cs typeface="メイリオ" charset="0"/>
@@ -4496,7 +4486,7 @@
                         <a:buNone/>
                       </a:pPr>
                       <a:r>
-                        <a:rPr lang="ja-JP" altLang="en-US" sz="2400" b="1" dirty="0">
+                        <a:rPr lang="ja-JP" altLang="en-US" sz="2200" b="1" dirty="0">
                           <a:solidFill>
                             <a:srgbClr val="262626"/>
                           </a:solidFill>
@@ -4507,7 +4497,7 @@
                         <a:t>アドレナリン</a:t>
                       </a:r>
                       <a:r>
-                        <a:rPr lang="ja-JP" altLang="en-US" sz="2400" dirty="0">
+                        <a:rPr lang="ja-JP" altLang="en-US" sz="2200" dirty="0">
                           <a:solidFill>
                             <a:srgbClr val="262626"/>
                           </a:solidFill>
@@ -4517,7 +4507,7 @@
                         </a:rPr>
                         <a:t>（α＋β）</a:t>
                       </a:r>
-                      <a:endParaRPr lang="en-US" sz="2400" dirty="0">
+                      <a:endParaRPr lang="en-US" sz="2200" dirty="0">
                         <a:latin typeface="メイリオ" charset="0"/>
                         <a:ea typeface="メイリオ" charset="0"/>
                         <a:cs typeface="メイリオ" charset="0"/>
@@ -5533,11 +5523,11 @@
         <p:spPr>
           <a:xfrm>
             <a:off x="502920" y="1691640"/>
-            <a:ext cx="3638398" cy="4178808"/>
+            <a:ext cx="3831336" cy="4178808"/>
           </a:xfrm>
           <a:prstGeom prst="roundRect">
             <a:avLst>
-              <a:gd name="adj" fmla="val 2011"/>
+              <a:gd name="adj" fmla="val 1909"/>
             </a:avLst>
           </a:prstGeom>
           <a:solidFill>
@@ -5555,7 +5545,7 @@
         <p:spPr>
           <a:xfrm>
             <a:off x="630936" y="1819656"/>
-            <a:ext cx="3382366" cy="457200"/>
+            <a:ext cx="3575304" cy="457200"/>
           </a:xfrm>
           <a:prstGeom prst="rect">
             <a:avLst/>
@@ -5594,7 +5584,7 @@
         <p:spPr>
           <a:xfrm>
             <a:off x="630936" y="2368296"/>
-            <a:ext cx="3382366" cy="859536"/>
+            <a:ext cx="3575304" cy="859536"/>
           </a:xfrm>
           <a:prstGeom prst="rect">
             <a:avLst/>
@@ -5623,17 +5613,6 @@
               </a:rPr>
               <a:t>持続：</a:t>
             </a:r>
-            <a:r>
-              <a:rPr lang="ja-JP" altLang="en-US" sz="2200" b="1" dirty="0">
-                <a:solidFill>
-                  <a:srgbClr val="0072B2"/>
-                </a:solidFill>
-                <a:latin typeface="メイリオ" pitchFamily="34" charset="0"/>
-                <a:ea typeface="メイリオ" pitchFamily="34" charset="-122"/>
-                <a:cs typeface="メイリオ" pitchFamily="34" charset="-120"/>
-              </a:rPr>
-              <a:t>2〜10 μg/kg/分</a:t>
-            </a:r>
             <a:endParaRPr lang="ja-JP" sz="2200" dirty="0"/>
           </a:p>
           <a:p>
@@ -5644,6 +5623,17 @@
               <a:buNone/>
             </a:pPr>
             <a:r>
+              <a:rPr lang="ja-JP" altLang="en-US" sz="2200" b="1" dirty="0">
+                <a:solidFill>
+                  <a:srgbClr val="0072B2"/>
+                </a:solidFill>
+                <a:latin typeface="メイリオ" pitchFamily="34" charset="0"/>
+                <a:ea typeface="メイリオ" pitchFamily="34" charset="-122"/>
+                <a:cs typeface="メイリオ" pitchFamily="34" charset="-120"/>
+              </a:rPr>
+              <a:t>2〜10 μg/kg/分</a:t>
+            </a:r>
+            <a:r>
               <a:rPr lang="ja-JP" altLang="en-US" sz="2200" dirty="0">
                 <a:solidFill>
                   <a:srgbClr val="262626"/>
@@ -5667,7 +5657,7 @@
         <p:spPr>
           <a:xfrm>
             <a:off x="630936" y="3419856"/>
-            <a:ext cx="3382366" cy="0"/>
+            <a:ext cx="3575304" cy="0"/>
           </a:xfrm>
           <a:prstGeom prst="line">
             <a:avLst/>
@@ -5690,7 +5680,7 @@
         <p:spPr>
           <a:xfrm>
             <a:off x="630936" y="3611880"/>
-            <a:ext cx="3382366" cy="859536"/>
+            <a:ext cx="3575304" cy="859536"/>
           </a:xfrm>
           <a:prstGeom prst="rect">
             <a:avLst/>
@@ -5763,7 +5753,7 @@
         <p:spPr>
           <a:xfrm>
             <a:off x="630936" y="4663440"/>
-            <a:ext cx="3382366" cy="0"/>
+            <a:ext cx="3575304" cy="0"/>
           </a:xfrm>
           <a:prstGeom prst="line">
             <a:avLst/>
@@ -5786,7 +5776,7 @@
         <p:spPr>
           <a:xfrm>
             <a:off x="630936" y="4855464"/>
-            <a:ext cx="3382366" cy="420624"/>
+            <a:ext cx="3575304" cy="420624"/>
           </a:xfrm>
           <a:prstGeom prst="rect">
             <a:avLst/>
@@ -5827,12 +5817,12 @@
         </p:nvSpPr>
         <p:spPr>
           <a:xfrm>
-            <a:off x="4360774" y="1691640"/>
-            <a:ext cx="3838651" cy="4178808"/>
+            <a:off x="4553712" y="1691640"/>
+            <a:ext cx="3831336" cy="4178808"/>
           </a:xfrm>
           <a:prstGeom prst="roundRect">
             <a:avLst>
-              <a:gd name="adj" fmla="val 1906"/>
+              <a:gd name="adj" fmla="val 1909"/>
             </a:avLst>
           </a:prstGeom>
           <a:solidFill>
@@ -5849,8 +5839,8 @@
         </p:nvSpPr>
         <p:spPr>
           <a:xfrm>
-            <a:off x="4488790" y="1819656"/>
-            <a:ext cx="3582619" cy="457200"/>
+            <a:off x="4681728" y="1819656"/>
+            <a:ext cx="3575304" cy="457200"/>
           </a:xfrm>
           <a:prstGeom prst="rect">
             <a:avLst/>
@@ -5888,8 +5878,8 @@
         </p:nvSpPr>
         <p:spPr>
           <a:xfrm>
-            <a:off x="4488790" y="2368296"/>
-            <a:ext cx="3582619" cy="859536"/>
+            <a:off x="4681728" y="2368296"/>
+            <a:ext cx="3575304" cy="859536"/>
           </a:xfrm>
           <a:prstGeom prst="rect">
             <a:avLst/>
@@ -5950,8 +5940,8 @@
         </p:nvSpPr>
         <p:spPr>
           <a:xfrm>
-            <a:off x="4488790" y="3419856"/>
-            <a:ext cx="3582619" cy="0"/>
+            <a:off x="4681728" y="3419856"/>
+            <a:ext cx="3575304" cy="0"/>
           </a:xfrm>
           <a:prstGeom prst="line">
             <a:avLst/>
@@ -5973,8 +5963,8 @@
         </p:nvSpPr>
         <p:spPr>
           <a:xfrm>
-            <a:off x="4488790" y="3611880"/>
-            <a:ext cx="3582619" cy="420624"/>
+            <a:off x="4681728" y="3611880"/>
+            <a:ext cx="3575304" cy="420624"/>
           </a:xfrm>
           <a:prstGeom prst="rect">
             <a:avLst/>
@@ -6015,8 +6005,8 @@
         </p:nvSpPr>
         <p:spPr>
           <a:xfrm>
-            <a:off x="4488790" y="4224528"/>
-            <a:ext cx="3582619" cy="0"/>
+            <a:off x="4681728" y="4663440"/>
+            <a:ext cx="3575304" cy="0"/>
           </a:xfrm>
           <a:prstGeom prst="line">
             <a:avLst/>
@@ -6038,8 +6028,8 @@
         </p:nvSpPr>
         <p:spPr>
           <a:xfrm>
-            <a:off x="4488790" y="4416552"/>
-            <a:ext cx="3582619" cy="420624"/>
+            <a:off x="4681728" y="4855464"/>
+            <a:ext cx="3575304" cy="420624"/>
           </a:xfrm>
           <a:prstGeom prst="rect">
             <a:avLst/>
@@ -6080,12 +6070,12 @@
         </p:nvSpPr>
         <p:spPr>
           <a:xfrm>
-            <a:off x="8418881" y="1691640"/>
-            <a:ext cx="3267151" cy="4178808"/>
+            <a:off x="8604504" y="1691640"/>
+            <a:ext cx="3081528" cy="4178808"/>
           </a:xfrm>
           <a:prstGeom prst="roundRect">
             <a:avLst>
-              <a:gd name="adj" fmla="val 2239"/>
+              <a:gd name="adj" fmla="val 2374"/>
             </a:avLst>
           </a:prstGeom>
           <a:solidFill>
@@ -6102,8 +6092,8 @@
         </p:nvSpPr>
         <p:spPr>
           <a:xfrm>
-            <a:off x="8546897" y="1819656"/>
-            <a:ext cx="3011119" cy="457200"/>
+            <a:off x="8732520" y="1819656"/>
+            <a:ext cx="2825496" cy="457200"/>
           </a:xfrm>
           <a:prstGeom prst="rect">
             <a:avLst/>
@@ -6141,8 +6131,8 @@
         </p:nvSpPr>
         <p:spPr>
           <a:xfrm>
-            <a:off x="8546897" y="2368296"/>
-            <a:ext cx="3011119" cy="420624"/>
+            <a:off x="8732520" y="2368296"/>
+            <a:ext cx="2825496" cy="420624"/>
           </a:xfrm>
           <a:prstGeom prst="rect">
             <a:avLst/>
@@ -6183,8 +6173,8 @@
         </p:nvSpPr>
         <p:spPr>
           <a:xfrm>
-            <a:off x="8546897" y="2980944"/>
-            <a:ext cx="3011119" cy="0"/>
+            <a:off x="8732520" y="3419856"/>
+            <a:ext cx="2825496" cy="0"/>
           </a:xfrm>
           <a:prstGeom prst="line">
             <a:avLst/>
@@ -6206,8 +6196,8 @@
         </p:nvSpPr>
         <p:spPr>
           <a:xfrm>
-            <a:off x="8546897" y="3172968"/>
-            <a:ext cx="3011119" cy="420624"/>
+            <a:off x="8732520" y="3611880"/>
+            <a:ext cx="2825496" cy="420624"/>
           </a:xfrm>
           <a:prstGeom prst="rect">
             <a:avLst/>
@@ -6248,8 +6238,8 @@
         </p:nvSpPr>
         <p:spPr>
           <a:xfrm>
-            <a:off x="8546897" y="3785616"/>
-            <a:ext cx="3011119" cy="0"/>
+            <a:off x="8732520" y="4663440"/>
+            <a:ext cx="2825496" cy="0"/>
           </a:xfrm>
           <a:prstGeom prst="line">
             <a:avLst/>
@@ -6271,8 +6261,8 @@
         </p:nvSpPr>
         <p:spPr>
           <a:xfrm>
-            <a:off x="8546897" y="3977640"/>
-            <a:ext cx="3011119" cy="859536"/>
+            <a:off x="8732520" y="4855464"/>
+            <a:ext cx="2825496" cy="859536"/>
           </a:xfrm>
           <a:prstGeom prst="rect">
             <a:avLst/>
@@ -6757,11 +6747,11 @@
         <p:spPr>
           <a:xfrm>
             <a:off x="502920" y="1691640"/>
-            <a:ext cx="4020617" cy="4178808"/>
+            <a:ext cx="3831336" cy="4178808"/>
           </a:xfrm>
           <a:prstGeom prst="roundRect">
             <a:avLst>
-              <a:gd name="adj" fmla="val 1819"/>
+              <a:gd name="adj" fmla="val 1909"/>
             </a:avLst>
           </a:prstGeom>
           <a:solidFill>
@@ -6779,7 +6769,7 @@
         <p:spPr>
           <a:xfrm>
             <a:off x="630936" y="1819656"/>
-            <a:ext cx="3764585" cy="457200"/>
+            <a:ext cx="3575304" cy="457200"/>
           </a:xfrm>
           <a:prstGeom prst="rect">
             <a:avLst/>
@@ -6818,7 +6808,7 @@
         <p:spPr>
           <a:xfrm>
             <a:off x="630936" y="2368296"/>
-            <a:ext cx="3764585" cy="859536"/>
+            <a:ext cx="3575304" cy="859536"/>
           </a:xfrm>
           <a:prstGeom prst="rect">
             <a:avLst/>
@@ -6890,8 +6880,8 @@
         </p:nvSpPr>
         <p:spPr>
           <a:xfrm>
-            <a:off x="630936" y="3419856"/>
-            <a:ext cx="3764585" cy="0"/>
+            <a:off x="630936" y="3319272"/>
+            <a:ext cx="3575304" cy="0"/>
           </a:xfrm>
           <a:prstGeom prst="line">
             <a:avLst/>
@@ -6913,8 +6903,8 @@
         </p:nvSpPr>
         <p:spPr>
           <a:xfrm>
-            <a:off x="630936" y="3611880"/>
-            <a:ext cx="3764585" cy="859536"/>
+            <a:off x="630936" y="3410712"/>
+            <a:ext cx="3575304" cy="859536"/>
           </a:xfrm>
           <a:prstGeom prst="rect">
             <a:avLst/>
@@ -6986,8 +6976,8 @@
         </p:nvSpPr>
         <p:spPr>
           <a:xfrm>
-            <a:off x="630936" y="4663440"/>
-            <a:ext cx="3764585" cy="0"/>
+            <a:off x="630936" y="4361688"/>
+            <a:ext cx="3575304" cy="0"/>
           </a:xfrm>
           <a:prstGeom prst="line">
             <a:avLst/>
@@ -7009,8 +6999,8 @@
         </p:nvSpPr>
         <p:spPr>
           <a:xfrm>
-            <a:off x="630936" y="4855464"/>
-            <a:ext cx="3764585" cy="420624"/>
+            <a:off x="630936" y="4453128"/>
+            <a:ext cx="3575304" cy="859536"/>
           </a:xfrm>
           <a:prstGeom prst="rect">
             <a:avLst/>
@@ -7037,93 +7027,10 @@
                 <a:ea typeface="メイリオ" pitchFamily="34" charset="-122"/>
                 <a:cs typeface="メイリオ" pitchFamily="34" charset="-120"/>
               </a:rPr>
-              <a:t>心不全・狭心症は別の用量</a:t>
+              <a:t>心不全・狭心症は</a:t>
             </a:r>
             <a:endParaRPr lang="ja-JP" sz="2200" dirty="0"/>
           </a:p>
-        </p:txBody>
-      </p:sp>
-      <p:sp>
-        <p:nvSpPr>
-          <p:cNvPr id="18" name="Shape 16"/>
-          <p:cNvSpPr/>
-          <p:nvPr/>
-        </p:nvSpPr>
-        <p:spPr>
-          <a:xfrm>
-            <a:off x="4742993" y="1691640"/>
-            <a:ext cx="3016606" cy="4178808"/>
-          </a:xfrm>
-          <a:prstGeom prst="roundRect">
-            <a:avLst>
-              <a:gd name="adj" fmla="val 2425"/>
-            </a:avLst>
-          </a:prstGeom>
-          <a:solidFill>
-            <a:srgbClr val="F2F2F2"/>
-          </a:solidFill>
-          <a:ln/>
-        </p:spPr>
-      </p:sp>
-      <p:sp>
-        <p:nvSpPr>
-          <p:cNvPr id="19" name="Text 17"/>
-          <p:cNvSpPr txBox="1"/>
-          <p:nvPr/>
-        </p:nvSpPr>
-        <p:spPr>
-          <a:xfrm>
-            <a:off x="4871009" y="1819656"/>
-            <a:ext cx="2760574" cy="457200"/>
-          </a:xfrm>
-          <a:prstGeom prst="rect">
-            <a:avLst/>
-          </a:prstGeom>
-          <a:noFill/>
-          <a:ln/>
-        </p:spPr>
-        <p:txBody>
-          <a:bodyPr wrap="square" lIns="0" tIns="0" rIns="0" bIns="0" rtlCol="0" anchor="t"/>
-          <a:lstStyle/>
-          <a:p>
-            <a:pPr algn="l" indent="0" marL="0">
-              <a:buNone/>
-            </a:pPr>
-            <a:r>
-              <a:rPr lang="ja-JP" altLang="en-US" sz="2400" b="1" dirty="0">
-                <a:solidFill>
-                  <a:srgbClr val="0072B2"/>
-                </a:solidFill>
-                <a:latin typeface="メイリオ" pitchFamily="34" charset="0"/>
-                <a:ea typeface="メイリオ" pitchFamily="34" charset="-122"/>
-                <a:cs typeface="メイリオ" pitchFamily="34" charset="-120"/>
-              </a:rPr>
-              <a:t>作用</a:t>
-            </a:r>
-            <a:endParaRPr lang="ja-JP" sz="2400" dirty="0"/>
-          </a:p>
-        </p:txBody>
-      </p:sp>
-      <p:sp>
-        <p:nvSpPr>
-          <p:cNvPr id="20" name="Text 18"/>
-          <p:cNvSpPr txBox="1"/>
-          <p:nvPr/>
-        </p:nvSpPr>
-        <p:spPr>
-          <a:xfrm>
-            <a:off x="4871009" y="2368296"/>
-            <a:ext cx="2760574" cy="859536"/>
-          </a:xfrm>
-          <a:prstGeom prst="rect">
-            <a:avLst/>
-          </a:prstGeom>
-          <a:noFill/>
-          <a:ln/>
-        </p:spPr>
-        <p:txBody>
-          <a:bodyPr wrap="square" lIns="0" tIns="0" rIns="0" bIns="0" rtlCol="0" anchor="t"/>
-          <a:lstStyle/>
           <a:p>
             <a:pPr algn="l" indent="0" marL="0">
               <a:spcAft>
@@ -7140,10 +7047,93 @@
                 <a:ea typeface="メイリオ" pitchFamily="34" charset="-122"/>
                 <a:cs typeface="メイリオ" pitchFamily="34" charset="-120"/>
               </a:rPr>
-              <a:t>NO で静脈を広げる</a:t>
+              <a:t>別の用量</a:t>
             </a:r>
             <a:endParaRPr lang="ja-JP" sz="2200" dirty="0"/>
           </a:p>
+        </p:txBody>
+      </p:sp>
+      <p:sp>
+        <p:nvSpPr>
+          <p:cNvPr id="18" name="Shape 16"/>
+          <p:cNvSpPr/>
+          <p:nvPr/>
+        </p:nvSpPr>
+        <p:spPr>
+          <a:xfrm>
+            <a:off x="4553712" y="1691640"/>
+            <a:ext cx="3831336" cy="4178808"/>
+          </a:xfrm>
+          <a:prstGeom prst="roundRect">
+            <a:avLst>
+              <a:gd name="adj" fmla="val 1909"/>
+            </a:avLst>
+          </a:prstGeom>
+          <a:solidFill>
+            <a:srgbClr val="F2F2F2"/>
+          </a:solidFill>
+          <a:ln/>
+        </p:spPr>
+      </p:sp>
+      <p:sp>
+        <p:nvSpPr>
+          <p:cNvPr id="19" name="Text 17"/>
+          <p:cNvSpPr txBox="1"/>
+          <p:nvPr/>
+        </p:nvSpPr>
+        <p:spPr>
+          <a:xfrm>
+            <a:off x="4681728" y="1819656"/>
+            <a:ext cx="3575304" cy="457200"/>
+          </a:xfrm>
+          <a:prstGeom prst="rect">
+            <a:avLst/>
+          </a:prstGeom>
+          <a:noFill/>
+          <a:ln/>
+        </p:spPr>
+        <p:txBody>
+          <a:bodyPr wrap="square" lIns="0" tIns="0" rIns="0" bIns="0" rtlCol="0" anchor="t"/>
+          <a:lstStyle/>
+          <a:p>
+            <a:pPr algn="l" indent="0" marL="0">
+              <a:buNone/>
+            </a:pPr>
+            <a:r>
+              <a:rPr lang="ja-JP" altLang="en-US" sz="2400" b="1" dirty="0">
+                <a:solidFill>
+                  <a:srgbClr val="0072B2"/>
+                </a:solidFill>
+                <a:latin typeface="メイリオ" pitchFamily="34" charset="0"/>
+                <a:ea typeface="メイリオ" pitchFamily="34" charset="-122"/>
+                <a:cs typeface="メイリオ" pitchFamily="34" charset="-120"/>
+              </a:rPr>
+              <a:t>作用</a:t>
+            </a:r>
+            <a:endParaRPr lang="ja-JP" sz="2400" dirty="0"/>
+          </a:p>
+        </p:txBody>
+      </p:sp>
+      <p:sp>
+        <p:nvSpPr>
+          <p:cNvPr id="20" name="Text 18"/>
+          <p:cNvSpPr txBox="1"/>
+          <p:nvPr/>
+        </p:nvSpPr>
+        <p:spPr>
+          <a:xfrm>
+            <a:off x="4681728" y="2368296"/>
+            <a:ext cx="3575304" cy="859536"/>
+          </a:xfrm>
+          <a:prstGeom prst="rect">
+            <a:avLst/>
+          </a:prstGeom>
+          <a:noFill/>
+          <a:ln/>
+        </p:spPr>
+        <p:txBody>
+          <a:bodyPr wrap="square" lIns="0" tIns="0" rIns="0" bIns="0" rtlCol="0" anchor="t"/>
+          <a:lstStyle/>
           <a:p>
             <a:pPr algn="l" indent="0" marL="0">
               <a:spcAft>
@@ -7160,6 +7150,26 @@
                 <a:ea typeface="メイリオ" pitchFamily="34" charset="-122"/>
                 <a:cs typeface="メイリオ" pitchFamily="34" charset="-120"/>
               </a:rPr>
+              <a:t>NO で静脈を広げる</a:t>
+            </a:r>
+            <a:endParaRPr lang="ja-JP" sz="2200" dirty="0"/>
+          </a:p>
+          <a:p>
+            <a:pPr algn="l" indent="0" marL="0">
+              <a:spcAft>
+                <a:spcPts val="100"/>
+              </a:spcAft>
+              <a:buNone/>
+            </a:pPr>
+            <a:r>
+              <a:rPr lang="ja-JP" altLang="en-US" sz="2200" dirty="0">
+                <a:solidFill>
+                  <a:srgbClr val="262626"/>
+                </a:solidFill>
+                <a:latin typeface="メイリオ" pitchFamily="34" charset="0"/>
+                <a:ea typeface="メイリオ" pitchFamily="34" charset="-122"/>
+                <a:cs typeface="メイリオ" pitchFamily="34" charset="-120"/>
+              </a:rPr>
               <a:t>（前負荷↓）</a:t>
             </a:r>
             <a:endParaRPr lang="ja-JP" sz="2200" dirty="0"/>
@@ -7174,8 +7184,8 @@
         </p:nvSpPr>
         <p:spPr>
           <a:xfrm>
-            <a:off x="4871009" y="3419856"/>
-            <a:ext cx="2760574" cy="0"/>
+            <a:off x="4681728" y="3319272"/>
+            <a:ext cx="3575304" cy="0"/>
           </a:xfrm>
           <a:prstGeom prst="line">
             <a:avLst/>
@@ -7197,8 +7207,8 @@
         </p:nvSpPr>
         <p:spPr>
           <a:xfrm>
-            <a:off x="4871009" y="3611880"/>
-            <a:ext cx="2760574" cy="420624"/>
+            <a:off x="4681728" y="3410712"/>
+            <a:ext cx="3575304" cy="420624"/>
           </a:xfrm>
           <a:prstGeom prst="rect">
             <a:avLst/>
@@ -7239,8 +7249,8 @@
         </p:nvSpPr>
         <p:spPr>
           <a:xfrm>
-            <a:off x="4871009" y="4224528"/>
-            <a:ext cx="2760574" cy="0"/>
+            <a:off x="4681728" y="4361688"/>
+            <a:ext cx="3575304" cy="0"/>
           </a:xfrm>
           <a:prstGeom prst="line">
             <a:avLst/>
@@ -7262,8 +7272,8 @@
         </p:nvSpPr>
         <p:spPr>
           <a:xfrm>
-            <a:off x="4871009" y="4416552"/>
-            <a:ext cx="2760574" cy="420624"/>
+            <a:off x="4681728" y="4453128"/>
+            <a:ext cx="3575304" cy="420624"/>
           </a:xfrm>
           <a:prstGeom prst="rect">
             <a:avLst/>
@@ -7304,12 +7314,12 @@
         </p:nvSpPr>
         <p:spPr>
           <a:xfrm>
-            <a:off x="7979054" y="1691640"/>
-            <a:ext cx="3706978" cy="4178808"/>
+            <a:off x="8604504" y="1691640"/>
+            <a:ext cx="3081528" cy="4178808"/>
           </a:xfrm>
           <a:prstGeom prst="roundRect">
             <a:avLst>
-              <a:gd name="adj" fmla="val 1973"/>
+              <a:gd name="adj" fmla="val 2374"/>
             </a:avLst>
           </a:prstGeom>
           <a:solidFill>
@@ -7326,8 +7336,8 @@
         </p:nvSpPr>
         <p:spPr>
           <a:xfrm>
-            <a:off x="8107070" y="1819656"/>
-            <a:ext cx="3450946" cy="457200"/>
+            <a:off x="8732520" y="1819656"/>
+            <a:ext cx="2825496" cy="457200"/>
           </a:xfrm>
           <a:prstGeom prst="rect">
             <a:avLst/>
@@ -7365,8 +7375,8 @@
         </p:nvSpPr>
         <p:spPr>
           <a:xfrm>
-            <a:off x="8107070" y="2368296"/>
-            <a:ext cx="3450946" cy="420624"/>
+            <a:off x="8732520" y="2368296"/>
+            <a:ext cx="2825496" cy="859536"/>
           </a:xfrm>
           <a:prstGeom prst="rect">
             <a:avLst/>
@@ -7393,7 +7403,27 @@
                 <a:ea typeface="メイリオ" pitchFamily="34" charset="-122"/>
                 <a:cs typeface="メイリオ" pitchFamily="34" charset="-120"/>
               </a:rPr>
-              <a:t>頭痛、反射性頻脈、耐性</a:t>
+              <a:t>頭痛、反射性頻脈、</a:t>
+            </a:r>
+            <a:endParaRPr lang="ja-JP" sz="2200" dirty="0"/>
+          </a:p>
+          <a:p>
+            <a:pPr algn="l" indent="0" marL="0">
+              <a:spcAft>
+                <a:spcPts val="100"/>
+              </a:spcAft>
+              <a:buNone/>
+            </a:pPr>
+            <a:r>
+              <a:rPr lang="ja-JP" altLang="en-US" sz="2200" dirty="0">
+                <a:solidFill>
+                  <a:srgbClr val="262626"/>
+                </a:solidFill>
+                <a:latin typeface="メイリオ" pitchFamily="34" charset="0"/>
+                <a:ea typeface="メイリオ" pitchFamily="34" charset="-122"/>
+                <a:cs typeface="メイリオ" pitchFamily="34" charset="-120"/>
+              </a:rPr>
+              <a:t>耐性</a:t>
             </a:r>
             <a:endParaRPr lang="ja-JP" sz="2200" dirty="0"/>
           </a:p>
@@ -7407,8 +7437,8 @@
         </p:nvSpPr>
         <p:spPr>
           <a:xfrm>
-            <a:off x="8107070" y="2980944"/>
-            <a:ext cx="3450946" cy="0"/>
+            <a:off x="8732520" y="3319272"/>
+            <a:ext cx="2825496" cy="0"/>
           </a:xfrm>
           <a:prstGeom prst="line">
             <a:avLst/>
@@ -7430,8 +7460,8 @@
         </p:nvSpPr>
         <p:spPr>
           <a:xfrm>
-            <a:off x="8107070" y="3172968"/>
-            <a:ext cx="3450946" cy="859536"/>
+            <a:off x="8732520" y="3410712"/>
+            <a:ext cx="2825496" cy="859536"/>
           </a:xfrm>
           <a:prstGeom prst="rect">
             <a:avLst/>
@@ -7492,8 +7522,8 @@
         </p:nvSpPr>
         <p:spPr>
           <a:xfrm>
-            <a:off x="8107070" y="4224528"/>
-            <a:ext cx="3450946" cy="0"/>
+            <a:off x="8732520" y="4361688"/>
+            <a:ext cx="2825496" cy="0"/>
           </a:xfrm>
           <a:prstGeom prst="line">
             <a:avLst/>
@@ -7515,8 +7545,8 @@
         </p:nvSpPr>
         <p:spPr>
           <a:xfrm>
-            <a:off x="8107070" y="4416552"/>
-            <a:ext cx="3450946" cy="1289304"/>
+            <a:off x="8732520" y="4453128"/>
+            <a:ext cx="2825496" cy="1289304"/>
           </a:xfrm>
           <a:prstGeom prst="rect">
             <a:avLst/>
@@ -8032,11 +8062,11 @@
         <p:spPr>
           <a:xfrm>
             <a:off x="502920" y="1691640"/>
-            <a:ext cx="3678631" cy="4178808"/>
+            <a:ext cx="3657600" cy="4178808"/>
           </a:xfrm>
           <a:prstGeom prst="roundRect">
             <a:avLst>
-              <a:gd name="adj" fmla="val 1989"/>
+              <a:gd name="adj" fmla="val 2000"/>
             </a:avLst>
           </a:prstGeom>
           <a:solidFill>
@@ -8054,7 +8084,7 @@
         <p:spPr>
           <a:xfrm>
             <a:off x="630936" y="1819656"/>
-            <a:ext cx="3422599" cy="914400"/>
+            <a:ext cx="3401568" cy="457200"/>
           </a:xfrm>
           <a:prstGeom prst="rect">
             <a:avLst/>
@@ -8078,24 +8108,7 @@
                 <a:ea typeface="メイリオ" pitchFamily="34" charset="-122"/>
                 <a:cs typeface="メイリオ" pitchFamily="34" charset="-120"/>
               </a:rPr>
-              <a:t>用量</a:t>
-            </a:r>
-            <a:endParaRPr lang="ja-JP" sz="2400" dirty="0"/>
-          </a:p>
-          <a:p>
-            <a:pPr algn="l" indent="0" marL="0">
-              <a:buNone/>
-            </a:pPr>
-            <a:r>
-              <a:rPr lang="ja-JP" altLang="en-US" sz="2400" b="1" dirty="0">
-                <a:solidFill>
-                  <a:srgbClr val="0072B2"/>
-                </a:solidFill>
-                <a:latin typeface="メイリオ" pitchFamily="34" charset="0"/>
-                <a:ea typeface="メイリオ" pitchFamily="34" charset="-122"/>
-                <a:cs typeface="メイリオ" pitchFamily="34" charset="-120"/>
-              </a:rPr>
-              <a:t>（添付文書・手術時）</a:t>
+              <a:t>用量（手術時）</a:t>
             </a:r>
             <a:endParaRPr lang="ja-JP" sz="2400" dirty="0"/>
           </a:p>
@@ -8109,8 +8122,8 @@
         </p:nvSpPr>
         <p:spPr>
           <a:xfrm>
-            <a:off x="630936" y="2825496"/>
-            <a:ext cx="3422599" cy="859536"/>
+            <a:off x="630936" y="2368296"/>
+            <a:ext cx="3401568" cy="859536"/>
           </a:xfrm>
           <a:prstGeom prst="rect">
             <a:avLst/>
@@ -8182,8 +8195,8 @@
         </p:nvSpPr>
         <p:spPr>
           <a:xfrm>
-            <a:off x="630936" y="3877056"/>
-            <a:ext cx="3422599" cy="0"/>
+            <a:off x="630936" y="3749040"/>
+            <a:ext cx="3401568" cy="0"/>
           </a:xfrm>
           <a:prstGeom prst="line">
             <a:avLst/>
@@ -8205,8 +8218,8 @@
         </p:nvSpPr>
         <p:spPr>
           <a:xfrm>
-            <a:off x="630936" y="4069080"/>
-            <a:ext cx="3422599" cy="420624"/>
+            <a:off x="630936" y="3840480"/>
+            <a:ext cx="3401568" cy="420624"/>
           </a:xfrm>
           <a:prstGeom prst="rect">
             <a:avLst/>
@@ -8258,8 +8271,8 @@
         </p:nvSpPr>
         <p:spPr>
           <a:xfrm>
-            <a:off x="630936" y="4681728"/>
-            <a:ext cx="3422599" cy="0"/>
+            <a:off x="630936" y="4791456"/>
+            <a:ext cx="3401568" cy="0"/>
           </a:xfrm>
           <a:prstGeom prst="line">
             <a:avLst/>
@@ -8281,8 +8294,8 @@
         </p:nvSpPr>
         <p:spPr>
           <a:xfrm>
-            <a:off x="630936" y="4873752"/>
-            <a:ext cx="3422599" cy="859536"/>
+            <a:off x="630936" y="4882896"/>
+            <a:ext cx="3401568" cy="859536"/>
           </a:xfrm>
           <a:prstGeom prst="rect">
             <a:avLst/>
@@ -8343,12 +8356,12 @@
         </p:nvSpPr>
         <p:spPr>
           <a:xfrm>
-            <a:off x="4401007" y="1691640"/>
-            <a:ext cx="3357677" cy="4178808"/>
+            <a:off x="4379976" y="1691640"/>
+            <a:ext cx="3386938" cy="4178808"/>
           </a:xfrm>
           <a:prstGeom prst="roundRect">
             <a:avLst>
-              <a:gd name="adj" fmla="val 2179"/>
+              <a:gd name="adj" fmla="val 2160"/>
             </a:avLst>
           </a:prstGeom>
           <a:solidFill>
@@ -8365,8 +8378,8 @@
         </p:nvSpPr>
         <p:spPr>
           <a:xfrm>
-            <a:off x="4529023" y="1819656"/>
-            <a:ext cx="3101645" cy="457200"/>
+            <a:off x="4507992" y="1819656"/>
+            <a:ext cx="3130906" cy="457200"/>
           </a:xfrm>
           <a:prstGeom prst="rect">
             <a:avLst/>
@@ -8404,8 +8417,8 @@
         </p:nvSpPr>
         <p:spPr>
           <a:xfrm>
-            <a:off x="4529023" y="2368296"/>
-            <a:ext cx="3101645" cy="859536"/>
+            <a:off x="4507992" y="2368296"/>
+            <a:ext cx="3130906" cy="859536"/>
           </a:xfrm>
           <a:prstGeom prst="rect">
             <a:avLst/>
@@ -8466,8 +8479,8 @@
         </p:nvSpPr>
         <p:spPr>
           <a:xfrm>
-            <a:off x="4529023" y="3419856"/>
-            <a:ext cx="3101645" cy="0"/>
+            <a:off x="4507992" y="3749040"/>
+            <a:ext cx="3130906" cy="0"/>
           </a:xfrm>
           <a:prstGeom prst="line">
             <a:avLst/>
@@ -8489,8 +8502,8 @@
         </p:nvSpPr>
         <p:spPr>
           <a:xfrm>
-            <a:off x="4529023" y="3611880"/>
-            <a:ext cx="3101645" cy="1289304"/>
+            <a:off x="4507992" y="3840480"/>
+            <a:ext cx="3130906" cy="859536"/>
           </a:xfrm>
           <a:prstGeom prst="rect">
             <a:avLst/>
@@ -8537,27 +8550,7 @@
                 <a:ea typeface="メイリオ" pitchFamily="34" charset="-122"/>
                 <a:cs typeface="メイリオ" pitchFamily="34" charset="-120"/>
               </a:rPr>
-              <a:t>血圧は</a:t>
-            </a:r>
-            <a:endParaRPr lang="ja-JP" sz="2200" dirty="0"/>
-          </a:p>
-          <a:p>
-            <a:pPr algn="l" indent="0" marL="0">
-              <a:spcAft>
-                <a:spcPts val="100"/>
-              </a:spcAft>
-              <a:buNone/>
-            </a:pPr>
-            <a:r>
-              <a:rPr lang="ja-JP" altLang="en-US" sz="2200" dirty="0">
-                <a:solidFill>
-                  <a:srgbClr val="262626"/>
-                </a:solidFill>
-                <a:latin typeface="メイリオ" pitchFamily="34" charset="0"/>
-                <a:ea typeface="メイリオ" pitchFamily="34" charset="-122"/>
-                <a:cs typeface="メイリオ" pitchFamily="34" charset="-120"/>
-              </a:rPr>
-              <a:t>あまり下げない</a:t>
+              <a:t>血圧はあまり下げない</a:t>
             </a:r>
             <a:endParaRPr lang="ja-JP" sz="2200" dirty="0"/>
           </a:p>
@@ -8571,8 +8564,8 @@
         </p:nvSpPr>
         <p:spPr>
           <a:xfrm>
-            <a:off x="4529023" y="5093208"/>
-            <a:ext cx="3101645" cy="0"/>
+            <a:off x="4507992" y="4791456"/>
+            <a:ext cx="3130906" cy="0"/>
           </a:xfrm>
           <a:prstGeom prst="line">
             <a:avLst/>
@@ -8594,8 +8587,8 @@
         </p:nvSpPr>
         <p:spPr>
           <a:xfrm>
-            <a:off x="4529023" y="5285232"/>
-            <a:ext cx="3101645" cy="420624"/>
+            <a:off x="4507992" y="4882896"/>
+            <a:ext cx="3130906" cy="420624"/>
           </a:xfrm>
           <a:prstGeom prst="rect">
             <a:avLst/>
@@ -8636,12 +8629,12 @@
         </p:nvSpPr>
         <p:spPr>
           <a:xfrm>
-            <a:off x="7978140" y="1691640"/>
-            <a:ext cx="3706978" cy="4178808"/>
+            <a:off x="7986370" y="1691640"/>
+            <a:ext cx="3699662" cy="4178808"/>
           </a:xfrm>
           <a:prstGeom prst="roundRect">
             <a:avLst>
-              <a:gd name="adj" fmla="val 1973"/>
+              <a:gd name="adj" fmla="val 1977"/>
             </a:avLst>
           </a:prstGeom>
           <a:solidFill>
@@ -8658,8 +8651,8 @@
         </p:nvSpPr>
         <p:spPr>
           <a:xfrm>
-            <a:off x="8106156" y="1819656"/>
-            <a:ext cx="3450946" cy="457200"/>
+            <a:off x="8114386" y="1819656"/>
+            <a:ext cx="3443630" cy="457200"/>
           </a:xfrm>
           <a:prstGeom prst="rect">
             <a:avLst/>
@@ -8697,8 +8690,8 @@
         </p:nvSpPr>
         <p:spPr>
           <a:xfrm>
-            <a:off x="8106156" y="2368296"/>
-            <a:ext cx="3450946" cy="1289304"/>
+            <a:off x="8114386" y="2368296"/>
+            <a:ext cx="3443630" cy="1289304"/>
           </a:xfrm>
           <a:prstGeom prst="rect">
             <a:avLst/>
@@ -8790,8 +8783,8 @@
         </p:nvSpPr>
         <p:spPr>
           <a:xfrm>
-            <a:off x="8106156" y="3749040"/>
-            <a:ext cx="3450946" cy="0"/>
+            <a:off x="8114386" y="3749040"/>
+            <a:ext cx="3443630" cy="0"/>
           </a:xfrm>
           <a:prstGeom prst="line">
             <a:avLst/>
@@ -8813,8 +8806,8 @@
         </p:nvSpPr>
         <p:spPr>
           <a:xfrm>
-            <a:off x="8106156" y="3840480"/>
-            <a:ext cx="3450946" cy="859536"/>
+            <a:off x="8114386" y="3840480"/>
+            <a:ext cx="3443630" cy="859536"/>
           </a:xfrm>
           <a:prstGeom prst="rect">
             <a:avLst/>
@@ -8897,8 +8890,8 @@
         </p:nvSpPr>
         <p:spPr>
           <a:xfrm>
-            <a:off x="8106156" y="4791456"/>
-            <a:ext cx="3450946" cy="0"/>
+            <a:off x="8114386" y="4791456"/>
+            <a:ext cx="3443630" cy="0"/>
           </a:xfrm>
           <a:prstGeom prst="line">
             <a:avLst/>
@@ -8920,8 +8913,8 @@
         </p:nvSpPr>
         <p:spPr>
           <a:xfrm>
-            <a:off x="8106156" y="4882896"/>
-            <a:ext cx="3450946" cy="859536"/>
+            <a:off x="8114386" y="4882896"/>
+            <a:ext cx="3443630" cy="859536"/>
           </a:xfrm>
           <a:prstGeom prst="rect">
             <a:avLst/>
@@ -9406,11 +9399,11 @@
         <p:spPr>
           <a:xfrm>
             <a:off x="502920" y="1691640"/>
-            <a:ext cx="3540557" cy="4178808"/>
+            <a:ext cx="3831336" cy="4178808"/>
           </a:xfrm>
           <a:prstGeom prst="roundRect">
             <a:avLst>
-              <a:gd name="adj" fmla="val 2066"/>
+              <a:gd name="adj" fmla="val 1909"/>
             </a:avLst>
           </a:prstGeom>
           <a:solidFill>
@@ -9428,7 +9421,7 @@
         <p:spPr>
           <a:xfrm>
             <a:off x="630936" y="1819656"/>
-            <a:ext cx="3284525" cy="457200"/>
+            <a:ext cx="3575304" cy="457200"/>
           </a:xfrm>
           <a:prstGeom prst="rect">
             <a:avLst/>
@@ -9467,7 +9460,7 @@
         <p:spPr>
           <a:xfrm>
             <a:off x="630936" y="2368296"/>
-            <a:ext cx="3284525" cy="420624"/>
+            <a:ext cx="3575304" cy="420624"/>
           </a:xfrm>
           <a:prstGeom prst="rect">
             <a:avLst/>
@@ -9519,8 +9512,8 @@
         </p:nvSpPr>
         <p:spPr>
           <a:xfrm>
-            <a:off x="630936" y="2980944"/>
-            <a:ext cx="3284525" cy="0"/>
+            <a:off x="630936" y="3419856"/>
+            <a:ext cx="3575304" cy="0"/>
           </a:xfrm>
           <a:prstGeom prst="line">
             <a:avLst/>
@@ -9542,8 +9535,8 @@
         </p:nvSpPr>
         <p:spPr>
           <a:xfrm>
-            <a:off x="630936" y="3172968"/>
-            <a:ext cx="3284525" cy="859536"/>
+            <a:off x="630936" y="3611880"/>
+            <a:ext cx="3575304" cy="859536"/>
           </a:xfrm>
           <a:prstGeom prst="rect">
             <a:avLst/>
@@ -9615,8 +9608,8 @@
         </p:nvSpPr>
         <p:spPr>
           <a:xfrm>
-            <a:off x="630936" y="4224528"/>
-            <a:ext cx="3284525" cy="0"/>
+            <a:off x="630936" y="4663440"/>
+            <a:ext cx="3575304" cy="0"/>
           </a:xfrm>
           <a:prstGeom prst="line">
             <a:avLst/>
@@ -9638,8 +9631,8 @@
         </p:nvSpPr>
         <p:spPr>
           <a:xfrm>
-            <a:off x="630936" y="4416552"/>
-            <a:ext cx="3284525" cy="1289304"/>
+            <a:off x="630936" y="4855464"/>
+            <a:ext cx="3575304" cy="859536"/>
           </a:xfrm>
           <a:prstGeom prst="rect">
             <a:avLst/>
@@ -9686,10 +9679,93 @@
                 <a:ea typeface="メイリオ" pitchFamily="34" charset="-122"/>
                 <a:cs typeface="メイリオ" pitchFamily="34" charset="-120"/>
               </a:rPr>
-              <a:t>5% ブドウ糖か</a:t>
+              <a:t>5% ブドウ糖か生食で希釈</a:t>
             </a:r>
             <a:endParaRPr lang="ja-JP" sz="2200" dirty="0"/>
           </a:p>
+        </p:txBody>
+      </p:sp>
+      <p:sp>
+        <p:nvSpPr>
+          <p:cNvPr id="18" name="Shape 16"/>
+          <p:cNvSpPr/>
+          <p:nvPr/>
+        </p:nvSpPr>
+        <p:spPr>
+          <a:xfrm>
+            <a:off x="4553712" y="1691640"/>
+            <a:ext cx="3831336" cy="4178808"/>
+          </a:xfrm>
+          <a:prstGeom prst="roundRect">
+            <a:avLst>
+              <a:gd name="adj" fmla="val 1909"/>
+            </a:avLst>
+          </a:prstGeom>
+          <a:solidFill>
+            <a:srgbClr val="F2F2F2"/>
+          </a:solidFill>
+          <a:ln/>
+        </p:spPr>
+      </p:sp>
+      <p:sp>
+        <p:nvSpPr>
+          <p:cNvPr id="19" name="Text 17"/>
+          <p:cNvSpPr txBox="1"/>
+          <p:nvPr/>
+        </p:nvSpPr>
+        <p:spPr>
+          <a:xfrm>
+            <a:off x="4681728" y="1819656"/>
+            <a:ext cx="3575304" cy="457200"/>
+          </a:xfrm>
+          <a:prstGeom prst="rect">
+            <a:avLst/>
+          </a:prstGeom>
+          <a:noFill/>
+          <a:ln/>
+        </p:spPr>
+        <p:txBody>
+          <a:bodyPr wrap="square" lIns="0" tIns="0" rIns="0" bIns="0" rtlCol="0" anchor="t"/>
+          <a:lstStyle/>
+          <a:p>
+            <a:pPr algn="l" indent="0" marL="0">
+              <a:buNone/>
+            </a:pPr>
+            <a:r>
+              <a:rPr lang="ja-JP" altLang="en-US" sz="2400" b="1" dirty="0">
+                <a:solidFill>
+                  <a:srgbClr val="0072B2"/>
+                </a:solidFill>
+                <a:latin typeface="メイリオ" pitchFamily="34" charset="0"/>
+                <a:ea typeface="メイリオ" pitchFamily="34" charset="-122"/>
+                <a:cs typeface="メイリオ" pitchFamily="34" charset="-120"/>
+              </a:rPr>
+              <a:t>作用</a:t>
+            </a:r>
+            <a:endParaRPr lang="ja-JP" sz="2400" dirty="0"/>
+          </a:p>
+        </p:txBody>
+      </p:sp>
+      <p:sp>
+        <p:nvSpPr>
+          <p:cNvPr id="20" name="Text 18"/>
+          <p:cNvSpPr txBox="1"/>
+          <p:nvPr/>
+        </p:nvSpPr>
+        <p:spPr>
+          <a:xfrm>
+            <a:off x="4681728" y="2368296"/>
+            <a:ext cx="3575304" cy="859536"/>
+          </a:xfrm>
+          <a:prstGeom prst="rect">
+            <a:avLst/>
+          </a:prstGeom>
+          <a:noFill/>
+          <a:ln/>
+        </p:spPr>
+        <p:txBody>
+          <a:bodyPr wrap="square" lIns="0" tIns="0" rIns="0" bIns="0" rtlCol="0" anchor="t"/>
+          <a:lstStyle/>
           <a:p>
             <a:pPr algn="l" indent="0" marL="0">
               <a:spcAft>
@@ -9706,93 +9782,10 @@
                 <a:ea typeface="メイリオ" pitchFamily="34" charset="-122"/>
                 <a:cs typeface="メイリオ" pitchFamily="34" charset="-120"/>
               </a:rPr>
-              <a:t>生食で希釈</a:t>
+              <a:t>β1 刺激で収縮力↑、</a:t>
             </a:r>
             <a:endParaRPr lang="ja-JP" sz="2200" dirty="0"/>
           </a:p>
-        </p:txBody>
-      </p:sp>
-      <p:sp>
-        <p:nvSpPr>
-          <p:cNvPr id="18" name="Shape 16"/>
-          <p:cNvSpPr/>
-          <p:nvPr/>
-        </p:nvSpPr>
-        <p:spPr>
-          <a:xfrm>
-            <a:off x="4262933" y="1691640"/>
-            <a:ext cx="3664001" cy="4178808"/>
-          </a:xfrm>
-          <a:prstGeom prst="roundRect">
-            <a:avLst>
-              <a:gd name="adj" fmla="val 1997"/>
-            </a:avLst>
-          </a:prstGeom>
-          <a:solidFill>
-            <a:srgbClr val="F2F2F2"/>
-          </a:solidFill>
-          <a:ln/>
-        </p:spPr>
-      </p:sp>
-      <p:sp>
-        <p:nvSpPr>
-          <p:cNvPr id="19" name="Text 17"/>
-          <p:cNvSpPr txBox="1"/>
-          <p:nvPr/>
-        </p:nvSpPr>
-        <p:spPr>
-          <a:xfrm>
-            <a:off x="4390949" y="1819656"/>
-            <a:ext cx="3407969" cy="457200"/>
-          </a:xfrm>
-          <a:prstGeom prst="rect">
-            <a:avLst/>
-          </a:prstGeom>
-          <a:noFill/>
-          <a:ln/>
-        </p:spPr>
-        <p:txBody>
-          <a:bodyPr wrap="square" lIns="0" tIns="0" rIns="0" bIns="0" rtlCol="0" anchor="t"/>
-          <a:lstStyle/>
-          <a:p>
-            <a:pPr algn="l" indent="0" marL="0">
-              <a:buNone/>
-            </a:pPr>
-            <a:r>
-              <a:rPr lang="ja-JP" altLang="en-US" sz="2400" b="1" dirty="0">
-                <a:solidFill>
-                  <a:srgbClr val="0072B2"/>
-                </a:solidFill>
-                <a:latin typeface="メイリオ" pitchFamily="34" charset="0"/>
-                <a:ea typeface="メイリオ" pitchFamily="34" charset="-122"/>
-                <a:cs typeface="メイリオ" pitchFamily="34" charset="-120"/>
-              </a:rPr>
-              <a:t>作用</a:t>
-            </a:r>
-            <a:endParaRPr lang="ja-JP" sz="2400" dirty="0"/>
-          </a:p>
-        </p:txBody>
-      </p:sp>
-      <p:sp>
-        <p:nvSpPr>
-          <p:cNvPr id="20" name="Text 18"/>
-          <p:cNvSpPr txBox="1"/>
-          <p:nvPr/>
-        </p:nvSpPr>
-        <p:spPr>
-          <a:xfrm>
-            <a:off x="4390949" y="2368296"/>
-            <a:ext cx="3407969" cy="859536"/>
-          </a:xfrm>
-          <a:prstGeom prst="rect">
-            <a:avLst/>
-          </a:prstGeom>
-          <a:noFill/>
-          <a:ln/>
-        </p:spPr>
-        <p:txBody>
-          <a:bodyPr wrap="square" lIns="0" tIns="0" rIns="0" bIns="0" rtlCol="0" anchor="t"/>
-          <a:lstStyle/>
           <a:p>
             <a:pPr algn="l" indent="0" marL="0">
               <a:spcAft>
@@ -9809,26 +9802,6 @@
                 <a:ea typeface="メイリオ" pitchFamily="34" charset="-122"/>
                 <a:cs typeface="メイリオ" pitchFamily="34" charset="-120"/>
               </a:rPr>
-              <a:t>β1 刺激で収縮力↑、</a:t>
-            </a:r>
-            <a:endParaRPr lang="ja-JP" sz="2200" dirty="0"/>
-          </a:p>
-          <a:p>
-            <a:pPr algn="l" indent="0" marL="0">
-              <a:spcAft>
-                <a:spcPts val="100"/>
-              </a:spcAft>
-              <a:buNone/>
-            </a:pPr>
-            <a:r>
-              <a:rPr lang="ja-JP" altLang="en-US" sz="2200" dirty="0">
-                <a:solidFill>
-                  <a:srgbClr val="262626"/>
-                </a:solidFill>
-                <a:latin typeface="メイリオ" pitchFamily="34" charset="0"/>
-                <a:ea typeface="メイリオ" pitchFamily="34" charset="-122"/>
-                <a:cs typeface="メイリオ" pitchFamily="34" charset="-120"/>
-              </a:rPr>
               <a:t>心拍数↑</a:t>
             </a:r>
             <a:endParaRPr lang="ja-JP" sz="2200" dirty="0"/>
@@ -9843,8 +9816,8 @@
         </p:nvSpPr>
         <p:spPr>
           <a:xfrm>
-            <a:off x="4390949" y="3419856"/>
-            <a:ext cx="3407969" cy="0"/>
+            <a:off x="4681728" y="3419856"/>
+            <a:ext cx="3575304" cy="0"/>
           </a:xfrm>
           <a:prstGeom prst="line">
             <a:avLst/>
@@ -9866,8 +9839,8 @@
         </p:nvSpPr>
         <p:spPr>
           <a:xfrm>
-            <a:off x="4390949" y="3611880"/>
-            <a:ext cx="3407969" cy="420624"/>
+            <a:off x="4681728" y="3611880"/>
+            <a:ext cx="3575304" cy="420624"/>
           </a:xfrm>
           <a:prstGeom prst="rect">
             <a:avLst/>
@@ -9908,8 +9881,8 @@
         </p:nvSpPr>
         <p:spPr>
           <a:xfrm>
-            <a:off x="4390949" y="4224528"/>
-            <a:ext cx="3407969" cy="0"/>
+            <a:off x="4681728" y="4663440"/>
+            <a:ext cx="3575304" cy="0"/>
           </a:xfrm>
           <a:prstGeom prst="line">
             <a:avLst/>
@@ -9931,8 +9904,8 @@
         </p:nvSpPr>
         <p:spPr>
           <a:xfrm>
-            <a:off x="4390949" y="4416552"/>
-            <a:ext cx="3407969" cy="859536"/>
+            <a:off x="4681728" y="4855464"/>
+            <a:ext cx="3575304" cy="859536"/>
           </a:xfrm>
           <a:prstGeom prst="rect">
             <a:avLst/>
@@ -9993,12 +9966,12 @@
         </p:nvSpPr>
         <p:spPr>
           <a:xfrm>
-            <a:off x="8146390" y="1691640"/>
-            <a:ext cx="3540557" cy="4178808"/>
+            <a:off x="8604504" y="1691640"/>
+            <a:ext cx="3081528" cy="4178808"/>
           </a:xfrm>
           <a:prstGeom prst="roundRect">
             <a:avLst>
-              <a:gd name="adj" fmla="val 2066"/>
+              <a:gd name="adj" fmla="val 2374"/>
             </a:avLst>
           </a:prstGeom>
           <a:solidFill>
@@ -10015,8 +9988,8 @@
         </p:nvSpPr>
         <p:spPr>
           <a:xfrm>
-            <a:off x="8274406" y="1819656"/>
-            <a:ext cx="3284525" cy="457200"/>
+            <a:off x="8732520" y="1819656"/>
+            <a:ext cx="2825496" cy="457200"/>
           </a:xfrm>
           <a:prstGeom prst="rect">
             <a:avLst/>
@@ -10054,8 +10027,8 @@
         </p:nvSpPr>
         <p:spPr>
           <a:xfrm>
-            <a:off x="8274406" y="2368296"/>
-            <a:ext cx="3284525" cy="420624"/>
+            <a:off x="8732520" y="2368296"/>
+            <a:ext cx="2825496" cy="420624"/>
           </a:xfrm>
           <a:prstGeom prst="rect">
             <a:avLst/>
@@ -10096,8 +10069,8 @@
         </p:nvSpPr>
         <p:spPr>
           <a:xfrm>
-            <a:off x="8274406" y="2980944"/>
-            <a:ext cx="3284525" cy="0"/>
+            <a:off x="8732520" y="3419856"/>
+            <a:ext cx="2825496" cy="0"/>
           </a:xfrm>
           <a:prstGeom prst="line">
             <a:avLst/>
@@ -10119,8 +10092,8 @@
         </p:nvSpPr>
         <p:spPr>
           <a:xfrm>
-            <a:off x="8274406" y="3172968"/>
-            <a:ext cx="3284525" cy="859536"/>
+            <a:off x="8732520" y="3611880"/>
+            <a:ext cx="2825496" cy="859536"/>
           </a:xfrm>
           <a:prstGeom prst="rect">
             <a:avLst/>
@@ -10181,8 +10154,8 @@
         </p:nvSpPr>
         <p:spPr>
           <a:xfrm>
-            <a:off x="8274406" y="4224528"/>
-            <a:ext cx="3284525" cy="0"/>
+            <a:off x="8732520" y="4663440"/>
+            <a:ext cx="2825496" cy="0"/>
           </a:xfrm>
           <a:prstGeom prst="line">
             <a:avLst/>
@@ -10204,8 +10177,8 @@
         </p:nvSpPr>
         <p:spPr>
           <a:xfrm>
-            <a:off x="8274406" y="4416552"/>
-            <a:ext cx="3284525" cy="859536"/>
+            <a:off x="8732520" y="4855464"/>
+            <a:ext cx="2825496" cy="859536"/>
           </a:xfrm>
           <a:prstGeom prst="rect">
             <a:avLst/>
@@ -10690,7 +10663,7 @@
         <p:spPr>
           <a:xfrm>
             <a:off x="502920" y="1691640"/>
-            <a:ext cx="4958791" cy="4178808"/>
+            <a:ext cx="4951476" cy="4178808"/>
           </a:xfrm>
           <a:prstGeom prst="roundRect">
             <a:avLst>
@@ -10712,7 +10685,7 @@
         <p:spPr>
           <a:xfrm>
             <a:off x="630936" y="1819656"/>
-            <a:ext cx="4702759" cy="457200"/>
+            <a:ext cx="4695444" cy="457200"/>
           </a:xfrm>
           <a:prstGeom prst="rect">
             <a:avLst/>
@@ -10751,7 +10724,7 @@
         <p:spPr>
           <a:xfrm>
             <a:off x="630936" y="2368296"/>
-            <a:ext cx="4702759" cy="420624"/>
+            <a:ext cx="4695444" cy="420624"/>
           </a:xfrm>
           <a:prstGeom prst="rect">
             <a:avLst/>
@@ -10836,8 +10809,8 @@
         </p:nvSpPr>
         <p:spPr>
           <a:xfrm>
-            <a:off x="630936" y="2980944"/>
-            <a:ext cx="4702759" cy="0"/>
+            <a:off x="630936" y="3319272"/>
+            <a:ext cx="4695444" cy="0"/>
           </a:xfrm>
           <a:prstGeom prst="line">
             <a:avLst/>
@@ -10859,8 +10832,8 @@
         </p:nvSpPr>
         <p:spPr>
           <a:xfrm>
-            <a:off x="630936" y="3172968"/>
-            <a:ext cx="4702759" cy="859536"/>
+            <a:off x="630936" y="3410712"/>
+            <a:ext cx="4695444" cy="859536"/>
           </a:xfrm>
           <a:prstGeom prst="rect">
             <a:avLst/>
@@ -10921,8 +10894,8 @@
         </p:nvSpPr>
         <p:spPr>
           <a:xfrm>
-            <a:off x="630936" y="4224528"/>
-            <a:ext cx="4702759" cy="0"/>
+            <a:off x="630936" y="4361688"/>
+            <a:ext cx="4695444" cy="0"/>
           </a:xfrm>
           <a:prstGeom prst="line">
             <a:avLst/>
@@ -10944,8 +10917,8 @@
         </p:nvSpPr>
         <p:spPr>
           <a:xfrm>
-            <a:off x="630936" y="4416552"/>
-            <a:ext cx="4702759" cy="1289304"/>
+            <a:off x="630936" y="4453128"/>
+            <a:ext cx="4695444" cy="1289304"/>
           </a:xfrm>
           <a:prstGeom prst="rect">
             <a:avLst/>
@@ -11037,12 +11010,12 @@
         </p:nvSpPr>
         <p:spPr>
           <a:xfrm>
-            <a:off x="5681167" y="1691640"/>
-            <a:ext cx="2703881" cy="4178808"/>
+            <a:off x="5673852" y="1691640"/>
+            <a:ext cx="2711196" cy="4178808"/>
           </a:xfrm>
           <a:prstGeom prst="roundRect">
             <a:avLst>
-              <a:gd name="adj" fmla="val 2705"/>
+              <a:gd name="adj" fmla="val 2698"/>
             </a:avLst>
           </a:prstGeom>
           <a:solidFill>
@@ -11059,8 +11032,8 @@
         </p:nvSpPr>
         <p:spPr>
           <a:xfrm>
-            <a:off x="5809183" y="1819656"/>
-            <a:ext cx="2447849" cy="457200"/>
+            <a:off x="5801868" y="1819656"/>
+            <a:ext cx="2455164" cy="457200"/>
           </a:xfrm>
           <a:prstGeom prst="rect">
             <a:avLst/>
@@ -11098,8 +11071,8 @@
         </p:nvSpPr>
         <p:spPr>
           <a:xfrm>
-            <a:off x="5809183" y="2368296"/>
-            <a:ext cx="2447849" cy="859536"/>
+            <a:off x="5801868" y="2368296"/>
+            <a:ext cx="2455164" cy="859536"/>
           </a:xfrm>
           <a:prstGeom prst="rect">
             <a:avLst/>
@@ -11160,8 +11133,8 @@
         </p:nvSpPr>
         <p:spPr>
           <a:xfrm>
-            <a:off x="5809183" y="3419856"/>
-            <a:ext cx="2447849" cy="0"/>
+            <a:off x="5801868" y="3319272"/>
+            <a:ext cx="2455164" cy="0"/>
           </a:xfrm>
           <a:prstGeom prst="line">
             <a:avLst/>
@@ -11183,8 +11156,8 @@
         </p:nvSpPr>
         <p:spPr>
           <a:xfrm>
-            <a:off x="5809183" y="3611880"/>
-            <a:ext cx="2447849" cy="1289304"/>
+            <a:off x="5801868" y="3410712"/>
+            <a:ext cx="2455164" cy="1289304"/>
           </a:xfrm>
           <a:prstGeom prst="rect">
             <a:avLst/>
@@ -11265,8 +11238,8 @@
         </p:nvSpPr>
         <p:spPr>
           <a:xfrm>
-            <a:off x="5809183" y="5093208"/>
-            <a:ext cx="2447849" cy="0"/>
+            <a:off x="5801868" y="4791456"/>
+            <a:ext cx="2455164" cy="0"/>
           </a:xfrm>
           <a:prstGeom prst="line">
             <a:avLst/>
@@ -11288,8 +11261,8 @@
         </p:nvSpPr>
         <p:spPr>
           <a:xfrm>
-            <a:off x="5809183" y="5285232"/>
-            <a:ext cx="2447849" cy="420624"/>
+            <a:off x="5801868" y="4882896"/>
+            <a:ext cx="2455164" cy="420624"/>
           </a:xfrm>
           <a:prstGeom prst="rect">
             <a:avLst/>
@@ -11453,7 +11426,7 @@
         </p:nvSpPr>
         <p:spPr>
           <a:xfrm>
-            <a:off x="8732520" y="3419856"/>
+            <a:off x="8732520" y="3319272"/>
             <a:ext cx="2825496" cy="0"/>
           </a:xfrm>
           <a:prstGeom prst="line">
@@ -11476,7 +11449,7 @@
         </p:nvSpPr>
         <p:spPr>
           <a:xfrm>
-            <a:off x="8732520" y="3611880"/>
+            <a:off x="8732520" y="3410712"/>
             <a:ext cx="2825496" cy="859536"/>
           </a:xfrm>
           <a:prstGeom prst="rect">
@@ -11538,7 +11511,7 @@
         </p:nvSpPr>
         <p:spPr>
           <a:xfrm>
-            <a:off x="8732520" y="4663440"/>
+            <a:off x="8732520" y="4361688"/>
             <a:ext cx="2825496" cy="0"/>
           </a:xfrm>
           <a:prstGeom prst="line">
@@ -11561,7 +11534,7 @@
         </p:nvSpPr>
         <p:spPr>
           <a:xfrm>
-            <a:off x="8732520" y="4855464"/>
+            <a:off x="8732520" y="4453128"/>
             <a:ext cx="2825496" cy="859536"/>
           </a:xfrm>
           <a:prstGeom prst="rect">
